--- a/Talk Presentation.pptx
+++ b/Talk Presentation.pptx
@@ -8,9 +8,10 @@
     <p:sldId id="256" r:id="rId2"/>
     <p:sldId id="257" r:id="rId3"/>
     <p:sldId id="258" r:id="rId4"/>
-    <p:sldId id="259" r:id="rId5"/>
-    <p:sldId id="260" r:id="rId6"/>
+    <p:sldId id="262" r:id="rId5"/>
+    <p:sldId id="259" r:id="rId6"/>
     <p:sldId id="261" r:id="rId7"/>
+    <p:sldId id="260" r:id="rId8"/>
   </p:sldIdLst>
   <p:sldSz cx="12192000" cy="6858000"/>
   <p:notesSz cx="6858000" cy="9144000"/>
@@ -131,7 +132,7 @@
 <file path=ppt/revisionInfo.xml><?xml version="1.0" encoding="utf-8"?>
 <p1510:revInfo xmlns:a="http://schemas.openxmlformats.org/drawingml/2006/main" xmlns:r="http://schemas.openxmlformats.org/officeDocument/2006/relationships" xmlns:p1510="http://schemas.microsoft.com/office/powerpoint/2015/10/main">
   <p1510:revLst>
-    <p1510:client id="{6E68D1F5-90E0-467A-8522-56BCA1BD0AB2}" v="2" dt="2026-03-04T18:50:48.721"/>
+    <p1510:client id="{4CC0FCD4-0B3B-45C0-9517-D2A8D398BE96}" v="361" dt="2026-03-06T15:35:25.520"/>
   </p1510:revLst>
 </p1510:revInfo>
 </file>
@@ -141,18 +142,18 @@
   <pc:docChgLst>
     <pc:chgData name="Sviatoslav Cherniak" userId="5ccca3ab7b45e3c7" providerId="LiveId" clId="{22238C8C-78F1-4C41-9404-AC2C8E199534}"/>
     <pc:docChg chg="undo custSel addSld delSld modSld sldOrd">
-      <pc:chgData name="Sviatoslav Cherniak" userId="5ccca3ab7b45e3c7" providerId="LiveId" clId="{22238C8C-78F1-4C41-9404-AC2C8E199534}" dt="2026-03-05T17:39:53.127" v="1552" actId="20577"/>
+      <pc:chgData name="Sviatoslav Cherniak" userId="5ccca3ab7b45e3c7" providerId="LiveId" clId="{22238C8C-78F1-4C41-9404-AC2C8E199534}" dt="2026-03-06T15:35:25.520" v="2239" actId="20577"/>
       <pc:docMkLst>
         <pc:docMk/>
       </pc:docMkLst>
       <pc:sldChg chg="modSp mod">
-        <pc:chgData name="Sviatoslav Cherniak" userId="5ccca3ab7b45e3c7" providerId="LiveId" clId="{22238C8C-78F1-4C41-9404-AC2C8E199534}" dt="2026-03-04T18:50:48.721" v="1546"/>
+        <pc:chgData name="Sviatoslav Cherniak" userId="5ccca3ab7b45e3c7" providerId="LiveId" clId="{22238C8C-78F1-4C41-9404-AC2C8E199534}" dt="2026-03-06T15:27:15.044" v="1887" actId="27636"/>
         <pc:sldMkLst>
           <pc:docMk/>
           <pc:sldMk cId="0" sldId="256"/>
         </pc:sldMkLst>
         <pc:spChg chg="mod">
-          <ac:chgData name="Sviatoslav Cherniak" userId="5ccca3ab7b45e3c7" providerId="LiveId" clId="{22238C8C-78F1-4C41-9404-AC2C8E199534}" dt="2026-03-04T18:50:40.766" v="1545" actId="27636"/>
+          <ac:chgData name="Sviatoslav Cherniak" userId="5ccca3ab7b45e3c7" providerId="LiveId" clId="{22238C8C-78F1-4C41-9404-AC2C8E199534}" dt="2026-03-06T15:27:15.044" v="1887" actId="27636"/>
           <ac:spMkLst>
             <pc:docMk/>
             <pc:sldMk cId="0" sldId="256"/>
@@ -160,7 +161,7 @@
           </ac:spMkLst>
         </pc:spChg>
         <pc:spChg chg="mod">
-          <ac:chgData name="Sviatoslav Cherniak" userId="5ccca3ab7b45e3c7" providerId="LiveId" clId="{22238C8C-78F1-4C41-9404-AC2C8E199534}" dt="2026-03-04T18:50:48.721" v="1546"/>
+          <ac:chgData name="Sviatoslav Cherniak" userId="5ccca3ab7b45e3c7" providerId="LiveId" clId="{22238C8C-78F1-4C41-9404-AC2C8E199534}" dt="2026-03-06T15:25:38.623" v="1885" actId="20577"/>
           <ac:spMkLst>
             <pc:docMk/>
             <pc:sldMk cId="0" sldId="256"/>
@@ -168,23 +169,127 @@
           </ac:spMkLst>
         </pc:spChg>
       </pc:sldChg>
-      <pc:sldChg chg="modSp new mod">
-        <pc:chgData name="Sviatoslav Cherniak" userId="5ccca3ab7b45e3c7" providerId="LiveId" clId="{22238C8C-78F1-4C41-9404-AC2C8E199534}" dt="2026-03-04T18:43:35.050" v="1391" actId="20577"/>
+      <pc:sldChg chg="addSp delSp modSp new mod ord setBg">
+        <pc:chgData name="Sviatoslav Cherniak" userId="5ccca3ab7b45e3c7" providerId="LiveId" clId="{22238C8C-78F1-4C41-9404-AC2C8E199534}" dt="2026-03-06T15:35:25.520" v="2239" actId="20577"/>
         <pc:sldMkLst>
           <pc:docMk/>
           <pc:sldMk cId="726010538" sldId="257"/>
         </pc:sldMkLst>
         <pc:spChg chg="mod">
-          <ac:chgData name="Sviatoslav Cherniak" userId="5ccca3ab7b45e3c7" providerId="LiveId" clId="{22238C8C-78F1-4C41-9404-AC2C8E199534}" dt="2026-03-04T18:43:35.050" v="1391" actId="20577"/>
+          <ac:chgData name="Sviatoslav Cherniak" userId="5ccca3ab7b45e3c7" providerId="LiveId" clId="{22238C8C-78F1-4C41-9404-AC2C8E199534}" dt="2026-03-06T15:03:28.975" v="1569" actId="26606"/>
           <ac:spMkLst>
             <pc:docMk/>
             <pc:sldMk cId="726010538" sldId="257"/>
             <ac:spMk id="2" creationId="{7CF6F00C-2792-2643-6284-DF23A8F1532F}"/>
           </ac:spMkLst>
         </pc:spChg>
+        <pc:spChg chg="del">
+          <ac:chgData name="Sviatoslav Cherniak" userId="5ccca3ab7b45e3c7" providerId="LiveId" clId="{22238C8C-78F1-4C41-9404-AC2C8E199534}" dt="2026-03-06T15:00:26.676" v="1553" actId="931"/>
+          <ac:spMkLst>
+            <pc:docMk/>
+            <pc:sldMk cId="726010538" sldId="257"/>
+            <ac:spMk id="3" creationId="{6E87133F-2A1B-8FEC-BF98-4FF599373E30}"/>
+          </ac:spMkLst>
+        </pc:spChg>
+        <pc:spChg chg="add del mod">
+          <ac:chgData name="Sviatoslav Cherniak" userId="5ccca3ab7b45e3c7" providerId="LiveId" clId="{22238C8C-78F1-4C41-9404-AC2C8E199534}" dt="2026-03-06T15:02:40.971" v="1562" actId="931"/>
+          <ac:spMkLst>
+            <pc:docMk/>
+            <pc:sldMk cId="726010538" sldId="257"/>
+            <ac:spMk id="7" creationId="{219098BC-64A4-93DE-8F44-73598E3B2287}"/>
+          </ac:spMkLst>
+        </pc:spChg>
+        <pc:spChg chg="add del mod">
+          <ac:chgData name="Sviatoslav Cherniak" userId="5ccca3ab7b45e3c7" providerId="LiveId" clId="{22238C8C-78F1-4C41-9404-AC2C8E199534}" dt="2026-03-06T15:02:53.728" v="1564" actId="931"/>
+          <ac:spMkLst>
+            <pc:docMk/>
+            <pc:sldMk cId="726010538" sldId="257"/>
+            <ac:spMk id="11" creationId="{31FF083D-15F2-B302-B34E-1C1696A32586}"/>
+          </ac:spMkLst>
+        </pc:spChg>
+        <pc:spChg chg="add del mod">
+          <ac:chgData name="Sviatoslav Cherniak" userId="5ccca3ab7b45e3c7" providerId="LiveId" clId="{22238C8C-78F1-4C41-9404-AC2C8E199534}" dt="2026-03-06T15:21:31.823" v="1757"/>
+          <ac:spMkLst>
+            <pc:docMk/>
+            <pc:sldMk cId="726010538" sldId="257"/>
+            <ac:spMk id="16" creationId="{0EA301E4-E11A-E4B5-C1E5-6E555715B29A}"/>
+          </ac:spMkLst>
+        </pc:spChg>
+        <pc:spChg chg="add mod">
+          <ac:chgData name="Sviatoslav Cherniak" userId="5ccca3ab7b45e3c7" providerId="LiveId" clId="{22238C8C-78F1-4C41-9404-AC2C8E199534}" dt="2026-03-06T15:23:45.616" v="1854" actId="1076"/>
+          <ac:spMkLst>
+            <pc:docMk/>
+            <pc:sldMk cId="726010538" sldId="257"/>
+            <ac:spMk id="17" creationId="{7709E378-30CF-E71E-28D9-1A940107D014}"/>
+          </ac:spMkLst>
+        </pc:spChg>
+        <pc:spChg chg="add del mod">
+          <ac:chgData name="Sviatoslav Cherniak" userId="5ccca3ab7b45e3c7" providerId="LiveId" clId="{22238C8C-78F1-4C41-9404-AC2C8E199534}" dt="2026-03-06T15:24:31.100" v="1856" actId="931"/>
+          <ac:spMkLst>
+            <pc:docMk/>
+            <pc:sldMk cId="726010538" sldId="257"/>
+            <ac:spMk id="19" creationId="{E9857D9A-6504-2F64-2555-E14A0C81A8A4}"/>
+          </ac:spMkLst>
+        </pc:spChg>
+        <pc:spChg chg="add">
+          <ac:chgData name="Sviatoslav Cherniak" userId="5ccca3ab7b45e3c7" providerId="LiveId" clId="{22238C8C-78F1-4C41-9404-AC2C8E199534}" dt="2026-03-06T15:03:28.975" v="1569" actId="26606"/>
+          <ac:spMkLst>
+            <pc:docMk/>
+            <pc:sldMk cId="726010538" sldId="257"/>
+            <ac:spMk id="20" creationId="{022BDE4A-8A20-4A69-9C5A-581C82036A4D}"/>
+          </ac:spMkLst>
+        </pc:spChg>
+        <pc:spChg chg="add mod">
+          <ac:chgData name="Sviatoslav Cherniak" userId="5ccca3ab7b45e3c7" providerId="LiveId" clId="{22238C8C-78F1-4C41-9404-AC2C8E199534}" dt="2026-03-06T15:35:25.520" v="2239" actId="20577"/>
+          <ac:spMkLst>
+            <pc:docMk/>
+            <pc:sldMk cId="726010538" sldId="257"/>
+            <ac:spMk id="23" creationId="{202D2835-666E-1573-34BC-C044AF68744C}"/>
+          </ac:spMkLst>
+        </pc:spChg>
+        <pc:picChg chg="add del mod ord">
+          <ac:chgData name="Sviatoslav Cherniak" userId="5ccca3ab7b45e3c7" providerId="LiveId" clId="{22238C8C-78F1-4C41-9404-AC2C8E199534}" dt="2026-03-06T15:01:03.082" v="1561" actId="21"/>
+          <ac:picMkLst>
+            <pc:docMk/>
+            <pc:sldMk cId="726010538" sldId="257"/>
+            <ac:picMk id="5" creationId="{2F2059D9-EDDA-095C-7A95-8B2134BF7C88}"/>
+          </ac:picMkLst>
+        </pc:picChg>
+        <pc:picChg chg="add del mod ord">
+          <ac:chgData name="Sviatoslav Cherniak" userId="5ccca3ab7b45e3c7" providerId="LiveId" clId="{22238C8C-78F1-4C41-9404-AC2C8E199534}" dt="2026-03-06T15:02:44.853" v="1563" actId="21"/>
+          <ac:picMkLst>
+            <pc:docMk/>
+            <pc:sldMk cId="726010538" sldId="257"/>
+            <ac:picMk id="9" creationId="{3147BC28-7695-4911-2BD2-08AB2F2AB038}"/>
+          </ac:picMkLst>
+        </pc:picChg>
+        <pc:picChg chg="add del mod ord">
+          <ac:chgData name="Sviatoslav Cherniak" userId="5ccca3ab7b45e3c7" providerId="LiveId" clId="{22238C8C-78F1-4C41-9404-AC2C8E199534}" dt="2026-03-06T15:24:18.333" v="1855" actId="21"/>
+          <ac:picMkLst>
+            <pc:docMk/>
+            <pc:sldMk cId="726010538" sldId="257"/>
+            <ac:picMk id="13" creationId="{A5418ECF-C12A-8E10-8E88-C1BAD32B9A79}"/>
+          </ac:picMkLst>
+        </pc:picChg>
+        <pc:picChg chg="add mod">
+          <ac:chgData name="Sviatoslav Cherniak" userId="5ccca3ab7b45e3c7" providerId="LiveId" clId="{22238C8C-78F1-4C41-9404-AC2C8E199534}" dt="2026-03-06T15:21:46.300" v="1759" actId="14100"/>
+          <ac:picMkLst>
+            <pc:docMk/>
+            <pc:sldMk cId="726010538" sldId="257"/>
+            <ac:picMk id="15" creationId="{DCA6CF49-2F6F-15B8-599F-A705AC9556DF}"/>
+          </ac:picMkLst>
+        </pc:picChg>
+        <pc:picChg chg="add mod ord">
+          <ac:chgData name="Sviatoslav Cherniak" userId="5ccca3ab7b45e3c7" providerId="LiveId" clId="{22238C8C-78F1-4C41-9404-AC2C8E199534}" dt="2026-03-06T15:24:41.630" v="1858" actId="14100"/>
+          <ac:picMkLst>
+            <pc:docMk/>
+            <pc:sldMk cId="726010538" sldId="257"/>
+            <ac:picMk id="22" creationId="{6F833946-557F-4876-4D4D-D0CA5DE7C4A0}"/>
+          </ac:picMkLst>
+        </pc:picChg>
       </pc:sldChg>
-      <pc:sldChg chg="modSp new mod ord">
-        <pc:chgData name="Sviatoslav Cherniak" userId="5ccca3ab7b45e3c7" providerId="LiveId" clId="{22238C8C-78F1-4C41-9404-AC2C8E199534}" dt="2026-03-04T18:21:30.790" v="1367" actId="20577"/>
+      <pc:sldChg chg="addSp delSp modSp new mod ord">
+        <pc:chgData name="Sviatoslav Cherniak" userId="5ccca3ab7b45e3c7" providerId="LiveId" clId="{22238C8C-78F1-4C41-9404-AC2C8E199534}" dt="2026-03-06T15:31:19.554" v="2206" actId="20577"/>
         <pc:sldMkLst>
           <pc:docMk/>
           <pc:sldMk cId="3848554601" sldId="258"/>
@@ -197,21 +302,93 @@
             <ac:spMk id="2" creationId="{BD504874-69E6-F79F-731F-12F9C014150F}"/>
           </ac:spMkLst>
         </pc:spChg>
+        <pc:spChg chg="del">
+          <ac:chgData name="Sviatoslav Cherniak" userId="5ccca3ab7b45e3c7" providerId="LiveId" clId="{22238C8C-78F1-4C41-9404-AC2C8E199534}" dt="2026-03-06T15:04:02.498" v="1570" actId="931"/>
+          <ac:spMkLst>
+            <pc:docMk/>
+            <pc:sldMk cId="3848554601" sldId="258"/>
+            <ac:spMk id="3" creationId="{E7EECFAA-BCF9-D71B-C646-0C0C56A67A99}"/>
+          </ac:spMkLst>
+        </pc:spChg>
+        <pc:spChg chg="add mod">
+          <ac:chgData name="Sviatoslav Cherniak" userId="5ccca3ab7b45e3c7" providerId="LiveId" clId="{22238C8C-78F1-4C41-9404-AC2C8E199534}" dt="2026-03-06T15:31:19.554" v="2206" actId="20577"/>
+          <ac:spMkLst>
+            <pc:docMk/>
+            <pc:sldMk cId="3848554601" sldId="258"/>
+            <ac:spMk id="11" creationId="{030A2210-6E3C-7373-596C-22834B2FB128}"/>
+          </ac:spMkLst>
+        </pc:spChg>
+        <pc:picChg chg="add del mod ord">
+          <ac:chgData name="Sviatoslav Cherniak" userId="5ccca3ab7b45e3c7" providerId="LiveId" clId="{22238C8C-78F1-4C41-9404-AC2C8E199534}" dt="2026-03-06T15:14:42.813" v="1586" actId="21"/>
+          <ac:picMkLst>
+            <pc:docMk/>
+            <pc:sldMk cId="3848554601" sldId="258"/>
+            <ac:picMk id="5" creationId="{7E8EBC69-1C89-10A1-6FE8-4BBCF026E825}"/>
+          </ac:picMkLst>
+        </pc:picChg>
+        <pc:picChg chg="add del mod">
+          <ac:chgData name="Sviatoslav Cherniak" userId="5ccca3ab7b45e3c7" providerId="LiveId" clId="{22238C8C-78F1-4C41-9404-AC2C8E199534}" dt="2026-03-06T15:04:52.989" v="1576" actId="21"/>
+          <ac:picMkLst>
+            <pc:docMk/>
+            <pc:sldMk cId="3848554601" sldId="258"/>
+            <ac:picMk id="7" creationId="{55CDFE1F-B491-CF78-8E6C-60BB5B0F30CB}"/>
+          </ac:picMkLst>
+        </pc:picChg>
+        <pc:picChg chg="add del mod">
+          <ac:chgData name="Sviatoslav Cherniak" userId="5ccca3ab7b45e3c7" providerId="LiveId" clId="{22238C8C-78F1-4C41-9404-AC2C8E199534}" dt="2026-03-06T15:14:49.453" v="1587" actId="21"/>
+          <ac:picMkLst>
+            <pc:docMk/>
+            <pc:sldMk cId="3848554601" sldId="258"/>
+            <ac:picMk id="9" creationId="{4C40D834-4AE6-E99A-632D-B4DE50829FA1}"/>
+          </ac:picMkLst>
+        </pc:picChg>
       </pc:sldChg>
-      <pc:sldChg chg="modSp new mod ord">
-        <pc:chgData name="Sviatoslav Cherniak" userId="5ccca3ab7b45e3c7" providerId="LiveId" clId="{22238C8C-78F1-4C41-9404-AC2C8E199534}" dt="2026-03-04T18:43:59.164" v="1418" actId="313"/>
+      <pc:sldChg chg="addSp delSp modSp new mod ord setBg">
+        <pc:chgData name="Sviatoslav Cherniak" userId="5ccca3ab7b45e3c7" providerId="LiveId" clId="{22238C8C-78F1-4C41-9404-AC2C8E199534}" dt="2026-03-06T15:15:13.683" v="1590" actId="26606"/>
         <pc:sldMkLst>
           <pc:docMk/>
           <pc:sldMk cId="2186260024" sldId="259"/>
         </pc:sldMkLst>
         <pc:spChg chg="mod">
-          <ac:chgData name="Sviatoslav Cherniak" userId="5ccca3ab7b45e3c7" providerId="LiveId" clId="{22238C8C-78F1-4C41-9404-AC2C8E199534}" dt="2026-03-04T18:43:59.164" v="1418" actId="313"/>
+          <ac:chgData name="Sviatoslav Cherniak" userId="5ccca3ab7b45e3c7" providerId="LiveId" clId="{22238C8C-78F1-4C41-9404-AC2C8E199534}" dt="2026-03-06T15:15:13.683" v="1590" actId="26606"/>
           <ac:spMkLst>
             <pc:docMk/>
             <pc:sldMk cId="2186260024" sldId="259"/>
             <ac:spMk id="2" creationId="{B6B3775E-22FE-4034-1E24-8E0EBDC17E3B}"/>
           </ac:spMkLst>
         </pc:spChg>
+        <pc:spChg chg="del">
+          <ac:chgData name="Sviatoslav Cherniak" userId="5ccca3ab7b45e3c7" providerId="LiveId" clId="{22238C8C-78F1-4C41-9404-AC2C8E199534}" dt="2026-03-06T15:15:09.999" v="1588" actId="931"/>
+          <ac:spMkLst>
+            <pc:docMk/>
+            <pc:sldMk cId="2186260024" sldId="259"/>
+            <ac:spMk id="3" creationId="{CF6F16F0-DECD-DB63-43EB-5EF8CC35E6D2}"/>
+          </ac:spMkLst>
+        </pc:spChg>
+        <pc:spChg chg="add">
+          <ac:chgData name="Sviatoslav Cherniak" userId="5ccca3ab7b45e3c7" providerId="LiveId" clId="{22238C8C-78F1-4C41-9404-AC2C8E199534}" dt="2026-03-06T15:15:13.683" v="1590" actId="26606"/>
+          <ac:spMkLst>
+            <pc:docMk/>
+            <pc:sldMk cId="2186260024" sldId="259"/>
+            <ac:spMk id="12" creationId="{022BDE4A-8A20-4A69-9C5A-581C82036A4D}"/>
+          </ac:spMkLst>
+        </pc:spChg>
+        <pc:picChg chg="add mod ord">
+          <ac:chgData name="Sviatoslav Cherniak" userId="5ccca3ab7b45e3c7" providerId="LiveId" clId="{22238C8C-78F1-4C41-9404-AC2C8E199534}" dt="2026-03-06T15:15:13.683" v="1590" actId="26606"/>
+          <ac:picMkLst>
+            <pc:docMk/>
+            <pc:sldMk cId="2186260024" sldId="259"/>
+            <ac:picMk id="5" creationId="{EA774F48-E2F7-FC5C-F2C7-4A00B8944967}"/>
+          </ac:picMkLst>
+        </pc:picChg>
+        <pc:picChg chg="add mod">
+          <ac:chgData name="Sviatoslav Cherniak" userId="5ccca3ab7b45e3c7" providerId="LiveId" clId="{22238C8C-78F1-4C41-9404-AC2C8E199534}" dt="2026-03-06T15:15:13.683" v="1590" actId="26606"/>
+          <ac:picMkLst>
+            <pc:docMk/>
+            <pc:sldMk cId="2186260024" sldId="259"/>
+            <ac:picMk id="7" creationId="{0224B80B-65BC-985B-C677-5369A8BC3D65}"/>
+          </ac:picMkLst>
+        </pc:picChg>
       </pc:sldChg>
       <pc:sldChg chg="modSp new mod">
         <pc:chgData name="Sviatoslav Cherniak" userId="5ccca3ab7b45e3c7" providerId="LiveId" clId="{22238C8C-78F1-4C41-9404-AC2C8E199534}" dt="2026-03-05T17:39:53.127" v="1552" actId="20577"/>
@@ -228,8 +405,8 @@
           </ac:spMkLst>
         </pc:spChg>
       </pc:sldChg>
-      <pc:sldChg chg="modSp new mod">
-        <pc:chgData name="Sviatoslav Cherniak" userId="5ccca3ab7b45e3c7" providerId="LiveId" clId="{22238C8C-78F1-4C41-9404-AC2C8E199534}" dt="2026-03-04T18:49:23.354" v="1512" actId="20577"/>
+      <pc:sldChg chg="modSp new mod ord">
+        <pc:chgData name="Sviatoslav Cherniak" userId="5ccca3ab7b45e3c7" providerId="LiveId" clId="{22238C8C-78F1-4C41-9404-AC2C8E199534}" dt="2026-03-06T15:29:05.550" v="2110"/>
         <pc:sldMkLst>
           <pc:docMk/>
           <pc:sldMk cId="196967786" sldId="261"/>
@@ -243,20 +420,76 @@
           </ac:spMkLst>
         </pc:spChg>
       </pc:sldChg>
-      <pc:sldChg chg="modSp new del mod">
-        <pc:chgData name="Sviatoslav Cherniak" userId="5ccca3ab7b45e3c7" providerId="LiveId" clId="{22238C8C-78F1-4C41-9404-AC2C8E199534}" dt="2026-03-04T18:11:48.175" v="1074" actId="2696"/>
+      <pc:sldChg chg="addSp delSp modSp new mod setBg">
+        <pc:chgData name="Sviatoslav Cherniak" userId="5ccca3ab7b45e3c7" providerId="LiveId" clId="{22238C8C-78F1-4C41-9404-AC2C8E199534}" dt="2026-03-06T15:18:13.349" v="1746" actId="20577"/>
         <pc:sldMkLst>
           <pc:docMk/>
-          <pc:sldMk cId="3736690610" sldId="261"/>
+          <pc:sldMk cId="629165924" sldId="262"/>
         </pc:sldMkLst>
         <pc:spChg chg="mod">
-          <ac:chgData name="Sviatoslav Cherniak" userId="5ccca3ab7b45e3c7" providerId="LiveId" clId="{22238C8C-78F1-4C41-9404-AC2C8E199534}" dt="2026-03-04T18:05:24.752" v="1063" actId="20577"/>
+          <ac:chgData name="Sviatoslav Cherniak" userId="5ccca3ab7b45e3c7" providerId="LiveId" clId="{22238C8C-78F1-4C41-9404-AC2C8E199534}" dt="2026-03-06T15:18:13.349" v="1746" actId="20577"/>
           <ac:spMkLst>
             <pc:docMk/>
-            <pc:sldMk cId="3736690610" sldId="261"/>
-            <ac:spMk id="2" creationId="{E3F53826-A42D-8AEC-0D2D-400A575D0DAE}"/>
+            <pc:sldMk cId="629165924" sldId="262"/>
+            <ac:spMk id="2" creationId="{14FDD7D8-CF90-939A-82A8-FDADB2F50FA8}"/>
           </ac:spMkLst>
         </pc:spChg>
+        <pc:spChg chg="del">
+          <ac:chgData name="Sviatoslav Cherniak" userId="5ccca3ab7b45e3c7" providerId="LiveId" clId="{22238C8C-78F1-4C41-9404-AC2C8E199534}" dt="2026-03-06T15:17:45.943" v="1696" actId="931"/>
+          <ac:spMkLst>
+            <pc:docMk/>
+            <pc:sldMk cId="629165924" sldId="262"/>
+            <ac:spMk id="3" creationId="{F615324A-F8B8-26E6-B638-5FA1E746470C}"/>
+          </ac:spMkLst>
+        </pc:spChg>
+        <pc:spChg chg="add del">
+          <ac:chgData name="Sviatoslav Cherniak" userId="5ccca3ab7b45e3c7" providerId="LiveId" clId="{22238C8C-78F1-4C41-9404-AC2C8E199534}" dt="2026-03-06T15:17:52.990" v="1700" actId="26606"/>
+          <ac:spMkLst>
+            <pc:docMk/>
+            <pc:sldMk cId="629165924" sldId="262"/>
+            <ac:spMk id="10" creationId="{BA79A7CF-01AF-4178-9369-94E0C90EB046}"/>
+          </ac:spMkLst>
+        </pc:spChg>
+        <pc:spChg chg="add del">
+          <ac:chgData name="Sviatoslav Cherniak" userId="5ccca3ab7b45e3c7" providerId="LiveId" clId="{22238C8C-78F1-4C41-9404-AC2C8E199534}" dt="2026-03-06T15:17:52.990" v="1700" actId="26606"/>
+          <ac:spMkLst>
+            <pc:docMk/>
+            <pc:sldMk cId="629165924" sldId="262"/>
+            <ac:spMk id="12" creationId="{99413ED5-9ED4-4772-BCE4-2BCAE6B12E35}"/>
+          </ac:spMkLst>
+        </pc:spChg>
+        <pc:spChg chg="add del">
+          <ac:chgData name="Sviatoslav Cherniak" userId="5ccca3ab7b45e3c7" providerId="LiveId" clId="{22238C8C-78F1-4C41-9404-AC2C8E199534}" dt="2026-03-06T15:17:52.990" v="1700" actId="26606"/>
+          <ac:spMkLst>
+            <pc:docMk/>
+            <pc:sldMk cId="629165924" sldId="262"/>
+            <ac:spMk id="14" creationId="{04357C93-F0CB-4A1C-8F77-4E9063789819}"/>
+          </ac:spMkLst>
+        </pc:spChg>
+        <pc:spChg chg="add del">
+          <ac:chgData name="Sviatoslav Cherniak" userId="5ccca3ab7b45e3c7" providerId="LiveId" clId="{22238C8C-78F1-4C41-9404-AC2C8E199534}" dt="2026-03-06T15:17:52.990" v="1700" actId="26606"/>
+          <ac:spMkLst>
+            <pc:docMk/>
+            <pc:sldMk cId="629165924" sldId="262"/>
+            <ac:spMk id="16" creationId="{90F533E9-6690-41A8-A372-4C6C622D028D}"/>
+          </ac:spMkLst>
+        </pc:spChg>
+        <pc:spChg chg="add">
+          <ac:chgData name="Sviatoslav Cherniak" userId="5ccca3ab7b45e3c7" providerId="LiveId" clId="{22238C8C-78F1-4C41-9404-AC2C8E199534}" dt="2026-03-06T15:17:52.998" v="1701" actId="26606"/>
+          <ac:spMkLst>
+            <pc:docMk/>
+            <pc:sldMk cId="629165924" sldId="262"/>
+            <ac:spMk id="18" creationId="{D4771268-CB57-404A-9271-370EB28F6090}"/>
+          </ac:spMkLst>
+        </pc:spChg>
+        <pc:picChg chg="add mod ord">
+          <ac:chgData name="Sviatoslav Cherniak" userId="5ccca3ab7b45e3c7" providerId="LiveId" clId="{22238C8C-78F1-4C41-9404-AC2C8E199534}" dt="2026-03-06T15:17:52.998" v="1701" actId="26606"/>
+          <ac:picMkLst>
+            <pc:docMk/>
+            <pc:sldMk cId="629165924" sldId="262"/>
+            <ac:picMk id="5" creationId="{6270C0BD-6819-5ED1-30E7-C1E0AA3F3718}"/>
+          </ac:picMkLst>
+        </pc:picChg>
       </pc:sldChg>
     </pc:docChg>
   </pc:docChgLst>
@@ -392,7 +625,7 @@
           <a:p>
             <a:fld id="{63A1C593-65D0-4073-BCC9-577B9352EA97}" type="datetimeFigureOut">
               <a:rPr lang="en-US" smtClean="0"/>
-              <a:t>3/4/2026</a:t>
+              <a:t>3/6/2026</a:t>
             </a:fld>
             <a:endParaRPr lang="en-US"/>
           </a:p>
@@ -555,7 +788,7 @@
           <a:p>
             <a:fld id="{63A1C593-65D0-4073-BCC9-577B9352EA97}" type="datetimeFigureOut">
               <a:rPr lang="en-US" smtClean="0"/>
-              <a:t>3/4/2026</a:t>
+              <a:t>3/6/2026</a:t>
             </a:fld>
             <a:endParaRPr lang="en-US"/>
           </a:p>
@@ -728,7 +961,7 @@
           <a:p>
             <a:fld id="{63A1C593-65D0-4073-BCC9-577B9352EA97}" type="datetimeFigureOut">
               <a:rPr lang="en-US" smtClean="0"/>
-              <a:t>3/4/2026</a:t>
+              <a:t>3/6/2026</a:t>
             </a:fld>
             <a:endParaRPr lang="en-US"/>
           </a:p>
@@ -891,7 +1124,7 @@
           <a:p>
             <a:fld id="{63A1C593-65D0-4073-BCC9-577B9352EA97}" type="datetimeFigureOut">
               <a:rPr lang="en-US" smtClean="0"/>
-              <a:t>3/4/2026</a:t>
+              <a:t>3/6/2026</a:t>
             </a:fld>
             <a:endParaRPr lang="en-US"/>
           </a:p>
@@ -1131,7 +1364,7 @@
           <a:p>
             <a:fld id="{63A1C593-65D0-4073-BCC9-577B9352EA97}" type="datetimeFigureOut">
               <a:rPr lang="en-US" smtClean="0"/>
-              <a:t>3/4/2026</a:t>
+              <a:t>3/6/2026</a:t>
             </a:fld>
             <a:endParaRPr lang="en-US"/>
           </a:p>
@@ -1355,7 +1588,7 @@
           <a:p>
             <a:fld id="{63A1C593-65D0-4073-BCC9-577B9352EA97}" type="datetimeFigureOut">
               <a:rPr lang="en-US" smtClean="0"/>
-              <a:t>3/4/2026</a:t>
+              <a:t>3/6/2026</a:t>
             </a:fld>
             <a:endParaRPr lang="en-US"/>
           </a:p>
@@ -1714,7 +1947,7 @@
           <a:p>
             <a:fld id="{63A1C593-65D0-4073-BCC9-577B9352EA97}" type="datetimeFigureOut">
               <a:rPr lang="en-US" smtClean="0"/>
-              <a:t>3/4/2026</a:t>
+              <a:t>3/6/2026</a:t>
             </a:fld>
             <a:endParaRPr lang="en-US"/>
           </a:p>
@@ -1826,7 +2059,7 @@
           <a:p>
             <a:fld id="{63A1C593-65D0-4073-BCC9-577B9352EA97}" type="datetimeFigureOut">
               <a:rPr lang="en-US" smtClean="0"/>
-              <a:t>3/4/2026</a:t>
+              <a:t>3/6/2026</a:t>
             </a:fld>
             <a:endParaRPr lang="en-US"/>
           </a:p>
@@ -1916,7 +2149,7 @@
           <a:p>
             <a:fld id="{63A1C593-65D0-4073-BCC9-577B9352EA97}" type="datetimeFigureOut">
               <a:rPr lang="en-US" smtClean="0"/>
-              <a:t>3/4/2026</a:t>
+              <a:t>3/6/2026</a:t>
             </a:fld>
             <a:endParaRPr lang="en-US"/>
           </a:p>
@@ -2186,7 +2419,7 @@
           <a:p>
             <a:fld id="{63A1C593-65D0-4073-BCC9-577B9352EA97}" type="datetimeFigureOut">
               <a:rPr lang="en-US" smtClean="0"/>
-              <a:t>3/4/2026</a:t>
+              <a:t>3/6/2026</a:t>
             </a:fld>
             <a:endParaRPr lang="en-US"/>
           </a:p>
@@ -2433,7 +2666,7 @@
           <a:p>
             <a:fld id="{63A1C593-65D0-4073-BCC9-577B9352EA97}" type="datetimeFigureOut">
               <a:rPr lang="en-US" smtClean="0"/>
-              <a:t>3/4/2026</a:t>
+              <a:t>3/6/2026</a:t>
             </a:fld>
             <a:endParaRPr lang="en-US"/>
           </a:p>
@@ -2639,7 +2872,7 @@
           <a:p>
             <a:fld id="{63A1C593-65D0-4073-BCC9-577B9352EA97}" type="datetimeFigureOut">
               <a:rPr lang="en-US" smtClean="0"/>
-              <a:t>3/4/2026</a:t>
+              <a:t>3/6/2026</a:t>
             </a:fld>
             <a:endParaRPr lang="en-US"/>
           </a:p>
@@ -3052,13 +3285,13 @@
         <p:spPr/>
         <p:txBody>
           <a:bodyPr>
-            <a:normAutofit fontScale="90000"/>
+            <a:normAutofit/>
           </a:bodyPr>
           <a:lstStyle/>
           <a:p>
             <a:r>
               <a:rPr lang="en-US" dirty="0"/>
-              <a:t> Games of long tailed Chicken in the arctic and the dessert.  </a:t>
+              <a:t> Games of long tailed Chicken in the arctic.  </a:t>
             </a:r>
           </a:p>
         </p:txBody>
@@ -3080,7 +3313,7 @@
           <a:p>
             <a:r>
               <a:rPr lang="en-GB" dirty="0"/>
-              <a:t>The fruits of interdisciplinary research in decision theory.</a:t>
+              <a:t>Irrationality and  fruits of interdisciplinary research in decision theory.</a:t>
             </a:r>
             <a:endParaRPr lang="en-US" dirty="0"/>
           </a:p>
@@ -3097,6 +3330,14 @@
 <file path=ppt/slides/slide2.xml><?xml version="1.0" encoding="utf-8"?>
 <p:sld xmlns:a="http://schemas.openxmlformats.org/drawingml/2006/main" xmlns:r="http://schemas.openxmlformats.org/officeDocument/2006/relationships" xmlns:p="http://schemas.openxmlformats.org/presentationml/2006/main">
   <p:cSld>
+    <p:bg>
+      <p:bgPr>
+        <a:solidFill>
+          <a:schemeClr val="bg1"/>
+        </a:solidFill>
+        <a:effectLst/>
+      </p:bgPr>
+    </p:bg>
     <p:spTree>
       <p:nvGrpSpPr>
         <p:cNvPr id="1" name=""/>
@@ -3111,6 +3352,66 @@
           <a:chExt cx="0" cy="0"/>
         </a:xfrm>
       </p:grpSpPr>
+      <p:sp useBgFill="1">
+        <p:nvSpPr>
+          <p:cNvPr id="20" name="Rectangle 19">
+            <a:extLst>
+              <a:ext uri="{FF2B5EF4-FFF2-40B4-BE49-F238E27FC236}">
+                <a16:creationId xmlns:a16="http://schemas.microsoft.com/office/drawing/2014/main" id="{022BDE4A-8A20-4A69-9C5A-581C82036A4D}"/>
+              </a:ext>
+              <a:ext uri="{C183D7F6-B498-43B3-948B-1728B52AA6E4}">
+                <adec:decorative xmlns:adec="http://schemas.microsoft.com/office/drawing/2017/decorative" val="1"/>
+              </a:ext>
+            </a:extLst>
+          </p:cNvPr>
+          <p:cNvSpPr>
+            <a:spLocks noGrp="1" noRot="1" noChangeAspect="1" noMove="1" noResize="1" noEditPoints="1" noAdjustHandles="1" noChangeArrowheads="1" noChangeShapeType="1" noTextEdit="1"/>
+          </p:cNvSpPr>
+          <p:nvPr>
+            <p:extLst>
+              <p:ext uri="{386F3935-93C4-4BCD-93E2-E3B085C9AB24}">
+                <p16:designElem xmlns:p16="http://schemas.microsoft.com/office/powerpoint/2015/main" val="1"/>
+              </p:ext>
+            </p:extLst>
+          </p:nvPr>
+        </p:nvSpPr>
+        <p:spPr>
+          <a:xfrm>
+            <a:off x="-1" y="0"/>
+            <a:ext cx="12188952" cy="6858000"/>
+          </a:xfrm>
+          <a:prstGeom prst="rect">
+            <a:avLst/>
+          </a:prstGeom>
+          <a:ln>
+            <a:noFill/>
+          </a:ln>
+        </p:spPr>
+        <p:style>
+          <a:lnRef idx="2">
+            <a:schemeClr val="accent1">
+              <a:shade val="50000"/>
+            </a:schemeClr>
+          </a:lnRef>
+          <a:fillRef idx="1">
+            <a:schemeClr val="accent1"/>
+          </a:fillRef>
+          <a:effectRef idx="0">
+            <a:schemeClr val="accent1"/>
+          </a:effectRef>
+          <a:fontRef idx="minor">
+            <a:schemeClr val="lt1"/>
+          </a:fontRef>
+        </p:style>
+        <p:txBody>
+          <a:bodyPr rtlCol="0" anchor="ctr"/>
+          <a:lstStyle/>
+          <a:p>
+            <a:pPr algn="ctr"/>
+            <a:endParaRPr lang="en-US"/>
+          </a:p>
+        </p:txBody>
+      </p:sp>
       <p:sp>
         <p:nvSpPr>
           <p:cNvPr id="2" name="Title 1">
@@ -3127,45 +3428,629 @@
             <p:ph type="title"/>
           </p:nvPr>
         </p:nvSpPr>
-        <p:spPr/>
-        <p:txBody>
-          <a:bodyPr>
-            <a:normAutofit fontScale="90000"/>
+        <p:spPr>
+          <a:xfrm>
+            <a:off x="1001684" y="170412"/>
+            <a:ext cx="10178934" cy="1328730"/>
+          </a:xfrm>
+        </p:spPr>
+        <p:txBody>
+          <a:bodyPr vert="horz" lIns="91440" tIns="45720" rIns="91440" bIns="45720" rtlCol="0" anchor="b">
+            <a:normAutofit/>
           </a:bodyPr>
           <a:lstStyle/>
           <a:p>
-            <a:r>
-              <a:rPr lang="en-GB" dirty="0"/>
+            <a:pPr algn="ctr"/>
+            <a:r>
+              <a:rPr lang="en-US" sz="3600" kern="1200" dirty="0">
+                <a:solidFill>
+                  <a:schemeClr val="tx1"/>
+                </a:solidFill>
+                <a:latin typeface="+mj-lt"/>
+                <a:ea typeface="+mj-ea"/>
+                <a:cs typeface="+mj-cs"/>
+              </a:rPr>
               <a:t>Sequential Games, Backward Induction and their limits under heavy tails . Chicken Game in Greenland.</a:t>
             </a:r>
           </a:p>
         </p:txBody>
       </p:sp>
-      <p:sp>
-        <p:nvSpPr>
-          <p:cNvPr id="3" name="Content Placeholder 2">
+      <p:pic>
+        <p:nvPicPr>
+          <p:cNvPr id="15" name="Picture 14">
             <a:extLst>
               <a:ext uri="{FF2B5EF4-FFF2-40B4-BE49-F238E27FC236}">
-                <a16:creationId xmlns:a16="http://schemas.microsoft.com/office/drawing/2014/main" id="{6E87133F-2A1B-8FEC-BF98-4FF599373E30}"/>
+                <a16:creationId xmlns:a16="http://schemas.microsoft.com/office/drawing/2014/main" id="{DCA6CF49-2F6F-15B8-599F-A705AC9556DF}"/>
               </a:ext>
             </a:extLst>
           </p:cNvPr>
-          <p:cNvSpPr>
-            <a:spLocks noGrp="1"/>
-          </p:cNvSpPr>
+          <p:cNvPicPr>
+            <a:picLocks noChangeAspect="1"/>
+          </p:cNvPicPr>
+          <p:nvPr/>
+        </p:nvPicPr>
+        <p:blipFill>
+          <a:blip r:embed="rId2">
+            <a:extLst>
+              <a:ext uri="{28A0092B-C50C-407E-A947-70E740481C1C}">
+                <a14:useLocalDpi xmlns:a14="http://schemas.microsoft.com/office/drawing/2010/main" val="0"/>
+              </a:ext>
+            </a:extLst>
+          </a:blip>
+          <a:srcRect l="16499" r="12646" b="2"/>
+          <a:stretch>
+            <a:fillRect/>
+          </a:stretch>
+        </p:blipFill>
+        <p:spPr>
+          <a:xfrm>
+            <a:off x="96104" y="2224969"/>
+            <a:ext cx="6911186" cy="4633032"/>
+          </a:xfrm>
+          <a:prstGeom prst="rect">
+            <a:avLst/>
+          </a:prstGeom>
+        </p:spPr>
+      </p:pic>
+      <mc:AlternateContent xmlns:mc="http://schemas.openxmlformats.org/markup-compatibility/2006">
+        <mc:Choice xmlns:a14="http://schemas.microsoft.com/office/drawing/2010/main" Requires="a14">
+          <p:sp>
+            <p:nvSpPr>
+              <p:cNvPr id="17" name="TextBox 16">
+                <a:extLst>
+                  <a:ext uri="{FF2B5EF4-FFF2-40B4-BE49-F238E27FC236}">
+                    <a16:creationId xmlns:a16="http://schemas.microsoft.com/office/drawing/2014/main" id="{7709E378-30CF-E71E-28D9-1A940107D014}"/>
+                  </a:ext>
+                </a:extLst>
+              </p:cNvPr>
+              <p:cNvSpPr txBox="1"/>
+              <p:nvPr/>
+            </p:nvSpPr>
+            <p:spPr>
+              <a:xfrm>
+                <a:off x="6522098" y="2083806"/>
+                <a:ext cx="5197151" cy="933589"/>
+              </a:xfrm>
+              <a:prstGeom prst="rect">
+                <a:avLst/>
+              </a:prstGeom>
+              <a:noFill/>
+            </p:spPr>
+            <p:txBody>
+              <a:bodyPr wrap="square" rtlCol="0">
+                <a:spAutoFit/>
+              </a:bodyPr>
+              <a:lstStyle/>
+              <a:p>
+                <a:r>
+                  <a:rPr lang="en-GB" dirty="0"/>
+                  <a:t>Richardson law in power law CDF form is expressed as </a:t>
+                </a:r>
+                <a14:m>
+                  <m:oMath xmlns:m="http://schemas.openxmlformats.org/officeDocument/2006/math">
+                    <m:r>
+                      <a:rPr lang="en-GB" i="1"/>
+                      <m:t>𝐹</m:t>
+                    </m:r>
+                    <m:d>
+                      <m:dPr>
+                        <m:ctrlPr>
+                          <a:rPr lang="en-GB" i="1"/>
+                        </m:ctrlPr>
+                      </m:dPr>
+                      <m:e>
+                        <m:r>
+                          <a:rPr lang="en-GB" i="1"/>
+                          <m:t>𝑥</m:t>
+                        </m:r>
+                      </m:e>
+                    </m:d>
+                    <m:r>
+                      <a:rPr lang="en-GB" i="1"/>
+                      <m:t>=1−</m:t>
+                    </m:r>
+                    <m:r>
+                      <a:rPr lang="en-GB" i="1"/>
+                      <m:t>𝐶</m:t>
+                    </m:r>
+                    <m:sSup>
+                      <m:sSupPr>
+                        <m:ctrlPr>
+                          <a:rPr lang="en-GB" i="1"/>
+                        </m:ctrlPr>
+                      </m:sSupPr>
+                      <m:e>
+                        <m:r>
+                          <a:rPr lang="en-GB" i="1"/>
+                          <m:t>𝑥</m:t>
+                        </m:r>
+                      </m:e>
+                      <m:sup>
+                        <m:r>
+                          <a:rPr lang="en-GB" i="1"/>
+                          <m:t>−</m:t>
+                        </m:r>
+                        <m:r>
+                          <a:rPr lang="en-GB" i="1"/>
+                          <m:t>𝑘</m:t>
+                        </m:r>
+                      </m:sup>
+                    </m:sSup>
+                    <m:r>
+                      <a:rPr lang="en-GB" i="1"/>
+                      <m:t>, </m:t>
+                    </m:r>
+                    <m:r>
+                      <a:rPr lang="en-GB" i="1"/>
+                      <m:t>𝑘</m:t>
+                    </m:r>
+                    <m:r>
+                      <a:rPr lang="en-GB" i="1"/>
+                      <m:t> </m:t>
+                    </m:r>
+                    <m:r>
+                      <a:rPr lang="en-GB" i="1"/>
+                      <m:t>𝑡𝑎𝑘𝑒𝑛</m:t>
+                    </m:r>
+                    <m:r>
+                      <a:rPr lang="en-GB" i="1"/>
+                      <m:t> </m:t>
+                    </m:r>
+                    <m:r>
+                      <a:rPr lang="en-GB" i="1"/>
+                      <m:t>𝑡𝑜</m:t>
+                    </m:r>
+                    <m:r>
+                      <a:rPr lang="en-GB" i="1"/>
+                      <m:t> </m:t>
+                    </m:r>
+                    <m:r>
+                      <a:rPr lang="en-GB" i="1"/>
+                      <m:t>𝑏𝑒</m:t>
+                    </m:r>
+                    <m:r>
+                      <a:rPr lang="en-GB" i="1"/>
+                      <m:t> 1.5</m:t>
+                    </m:r>
+                    <m:r>
+                      <a:rPr lang="en-GB" b="0" i="1" smtClean="0">
+                        <a:latin typeface="Cambria Math" panose="02040503050406030204" pitchFamily="18" charset="0"/>
+                      </a:rPr>
+                      <m:t>−1.7</m:t>
+                    </m:r>
+                  </m:oMath>
+                </a14:m>
+                <a:endParaRPr lang="en-GB" dirty="0"/>
+              </a:p>
+              <a:p>
+                <a:endParaRPr lang="en-GB" dirty="0"/>
+              </a:p>
+            </p:txBody>
+          </p:sp>
+        </mc:Choice>
+        <mc:Fallback>
+          <p:sp>
+            <p:nvSpPr>
+              <p:cNvPr id="17" name="TextBox 16">
+                <a:extLst>
+                  <a:ext uri="{FF2B5EF4-FFF2-40B4-BE49-F238E27FC236}">
+                    <a16:creationId xmlns:a16="http://schemas.microsoft.com/office/drawing/2014/main" id="{7709E378-30CF-E71E-28D9-1A940107D014}"/>
+                  </a:ext>
+                </a:extLst>
+              </p:cNvPr>
+              <p:cNvSpPr txBox="1">
+                <a:spLocks noRot="1" noChangeAspect="1" noMove="1" noResize="1" noEditPoints="1" noAdjustHandles="1" noChangeArrowheads="1" noChangeShapeType="1" noTextEdit="1"/>
+              </p:cNvSpPr>
+              <p:nvPr/>
+            </p:nvSpPr>
+            <p:spPr>
+              <a:xfrm>
+                <a:off x="6522098" y="2083806"/>
+                <a:ext cx="5197151" cy="933589"/>
+              </a:xfrm>
+              <a:prstGeom prst="rect">
+                <a:avLst/>
+              </a:prstGeom>
+              <a:blipFill>
+                <a:blip r:embed="rId3"/>
+                <a:stretch>
+                  <a:fillRect l="-1056" t="-3922" r="-1878"/>
+                </a:stretch>
+              </a:blipFill>
+            </p:spPr>
+            <p:txBody>
+              <a:bodyPr/>
+              <a:lstStyle/>
+              <a:p>
+                <a:r>
+                  <a:rPr lang="en-GB">
+                    <a:noFill/>
+                  </a:rPr>
+                  <a:t> </a:t>
+                </a:r>
+              </a:p>
+            </p:txBody>
+          </p:sp>
+        </mc:Fallback>
+      </mc:AlternateContent>
+      <p:pic>
+        <p:nvPicPr>
+          <p:cNvPr id="22" name="Content Placeholder 21">
+            <a:extLst>
+              <a:ext uri="{FF2B5EF4-FFF2-40B4-BE49-F238E27FC236}">
+                <a16:creationId xmlns:a16="http://schemas.microsoft.com/office/drawing/2014/main" id="{6F833946-557F-4876-4D4D-D0CA5DE7C4A0}"/>
+              </a:ext>
+            </a:extLst>
+          </p:cNvPr>
+          <p:cNvPicPr>
+            <a:picLocks noGrp="1" noChangeAspect="1"/>
+          </p:cNvPicPr>
           <p:nvPr>
             <p:ph idx="1"/>
           </p:nvPr>
-        </p:nvSpPr>
-        <p:spPr/>
-        <p:txBody>
-          <a:bodyPr/>
-          <a:lstStyle/>
-          <a:p>
-            <a:endParaRPr lang="en-GB" dirty="0"/>
-          </a:p>
-        </p:txBody>
-      </p:sp>
+        </p:nvPicPr>
+        <p:blipFill>
+          <a:blip r:embed="rId4">
+            <a:extLst>
+              <a:ext uri="{28A0092B-C50C-407E-A947-70E740481C1C}">
+                <a14:useLocalDpi xmlns:a14="http://schemas.microsoft.com/office/drawing/2010/main" val="0"/>
+              </a:ext>
+            </a:extLst>
+          </a:blip>
+          <a:stretch>
+            <a:fillRect/>
+          </a:stretch>
+        </p:blipFill>
+        <p:spPr>
+          <a:xfrm>
+            <a:off x="6608222" y="2966944"/>
+            <a:ext cx="4859100" cy="3247499"/>
+          </a:xfrm>
+          <a:prstGeom prst="rect">
+            <a:avLst/>
+          </a:prstGeom>
+        </p:spPr>
+      </p:pic>
+      <mc:AlternateContent xmlns:mc="http://schemas.openxmlformats.org/markup-compatibility/2006">
+        <mc:Choice xmlns:a14="http://schemas.microsoft.com/office/drawing/2010/main" Requires="a14">
+          <p:sp>
+            <p:nvSpPr>
+              <p:cNvPr id="23" name="TextBox 22">
+                <a:extLst>
+                  <a:ext uri="{FF2B5EF4-FFF2-40B4-BE49-F238E27FC236}">
+                    <a16:creationId xmlns:a16="http://schemas.microsoft.com/office/drawing/2014/main" id="{202D2835-666E-1573-34BC-C044AF68744C}"/>
+                  </a:ext>
+                </a:extLst>
+              </p:cNvPr>
+              <p:cNvSpPr txBox="1"/>
+              <p:nvPr/>
+            </p:nvSpPr>
+            <p:spPr>
+              <a:xfrm>
+                <a:off x="1231641" y="1772816"/>
+                <a:ext cx="4349396" cy="923330"/>
+              </a:xfrm>
+              <a:prstGeom prst="rect">
+                <a:avLst/>
+              </a:prstGeom>
+              <a:noFill/>
+            </p:spPr>
+            <p:txBody>
+              <a:bodyPr wrap="none" rtlCol="0">
+                <a:spAutoFit/>
+              </a:bodyPr>
+              <a:lstStyle/>
+              <a:p>
+                <a14:m>
+                  <m:oMathPara xmlns:m="http://schemas.openxmlformats.org/officeDocument/2006/math">
+                    <m:oMathParaPr>
+                      <m:jc m:val="centerGroup"/>
+                    </m:oMathParaPr>
+                    <m:oMath xmlns:m="http://schemas.openxmlformats.org/officeDocument/2006/math">
+                      <m:r>
+                        <a:rPr lang="en-GB" i="1" smtClean="0">
+                          <a:latin typeface="Cambria Math" panose="02040503050406030204" pitchFamily="18" charset="0"/>
+                        </a:rPr>
+                        <m:t>𝐸</m:t>
+                      </m:r>
+                      <m:r>
+                        <a:rPr lang="en-GB" i="1" smtClean="0">
+                          <a:latin typeface="Cambria Math" panose="02040503050406030204" pitchFamily="18" charset="0"/>
+                        </a:rPr>
+                        <m:t>[</m:t>
+                      </m:r>
+                      <m:r>
+                        <a:rPr lang="en-GB" i="1">
+                          <a:latin typeface="Cambria Math" panose="02040503050406030204" pitchFamily="18" charset="0"/>
+                        </a:rPr>
+                        <m:t>𝑈</m:t>
+                      </m:r>
+                      <m:r>
+                        <a:rPr lang="en-GB" i="1">
+                          <a:latin typeface="Cambria Math" panose="02040503050406030204" pitchFamily="18" charset="0"/>
+                        </a:rPr>
+                        <m:t> </m:t>
+                      </m:r>
+                      <m:d>
+                        <m:dPr>
+                          <m:ctrlPr>
+                            <a:rPr lang="en-GB" i="1" smtClean="0"/>
+                          </m:ctrlPr>
+                        </m:dPr>
+                        <m:e>
+                          <m:r>
+                            <a:rPr lang="en-GB" i="1"/>
+                            <m:t>𝑢</m:t>
+                          </m:r>
+                          <m:r>
+                            <a:rPr lang="en-GB" b="0" i="1" smtClean="0">
+                              <a:latin typeface="Cambria Math" panose="02040503050406030204" pitchFamily="18" charset="0"/>
+                            </a:rPr>
+                            <m:t>𝑠</m:t>
+                          </m:r>
+                          <m:r>
+                            <a:rPr lang="en-GB" i="1"/>
+                            <m:t>;</m:t>
+                          </m:r>
+                          <m:r>
+                            <a:rPr lang="en-GB" i="1"/>
+                            <m:t>𝑒𝑠𝑐𝑎𝑙𝑎𝑡𝑒</m:t>
+                          </m:r>
+                        </m:e>
+                      </m:d>
+                      <m:r>
+                        <a:rPr lang="en-GB" b="0" i="1" smtClean="0">
+                          <a:latin typeface="Cambria Math" panose="02040503050406030204" pitchFamily="18" charset="0"/>
+                        </a:rPr>
+                        <m:t>]</m:t>
+                      </m:r>
+                      <m:r>
+                        <a:rPr lang="en-GB" i="1"/>
+                        <m:t>=</m:t>
+                      </m:r>
+                      <m:r>
+                        <a:rPr lang="en-GB" i="1"/>
+                        <m:t>𝐸</m:t>
+                      </m:r>
+                      <m:r>
+                        <a:rPr lang="en-GB" b="0" i="1" smtClean="0">
+                          <a:latin typeface="Cambria Math" panose="02040503050406030204" pitchFamily="18" charset="0"/>
+                        </a:rPr>
+                        <m:t>[</m:t>
+                      </m:r>
+                      <m:r>
+                        <a:rPr lang="en-GB" i="1"/>
+                        <m:t>𝑈</m:t>
+                      </m:r>
+                      <m:r>
+                        <a:rPr lang="en-GB" i="1"/>
+                        <m:t> </m:t>
+                      </m:r>
+                      <m:d>
+                        <m:dPr>
+                          <m:ctrlPr>
+                            <a:rPr lang="en-GB" i="1"/>
+                          </m:ctrlPr>
+                        </m:dPr>
+                        <m:e>
+                          <m:r>
+                            <a:rPr lang="en-GB" i="1"/>
+                            <m:t>𝑢</m:t>
+                          </m:r>
+                          <m:r>
+                            <a:rPr lang="en-GB" b="0" i="1" smtClean="0">
+                              <a:latin typeface="Cambria Math" panose="02040503050406030204" pitchFamily="18" charset="0"/>
+                            </a:rPr>
+                            <m:t>𝑠</m:t>
+                          </m:r>
+                          <m:r>
+                            <a:rPr lang="en-GB" i="1"/>
+                            <m:t>;</m:t>
+                          </m:r>
+                          <m:r>
+                            <a:rPr lang="en-GB" i="1"/>
+                            <m:t>𝑠𝑤𝑒𝑟𝑣𝑒</m:t>
+                          </m:r>
+                        </m:e>
+                      </m:d>
+                      <m:r>
+                        <a:rPr lang="en-GB" b="0" i="0" smtClean="0">
+                          <a:latin typeface="Cambria Math" panose="02040503050406030204" pitchFamily="18" charset="0"/>
+                        </a:rPr>
+                        <m:t>]</m:t>
+                      </m:r>
+                    </m:oMath>
+                  </m:oMathPara>
+                </a14:m>
+                <a:endParaRPr lang="en-GB" dirty="0"/>
+              </a:p>
+              <a:p>
+                <a14:m>
+                  <m:oMathPara xmlns:m="http://schemas.openxmlformats.org/officeDocument/2006/math">
+                    <m:oMathParaPr>
+                      <m:jc m:val="centerGroup"/>
+                    </m:oMathParaPr>
+                    <m:oMath xmlns:m="http://schemas.openxmlformats.org/officeDocument/2006/math">
+                      <m:r>
+                        <a:rPr lang="en-GB" i="1">
+                          <a:latin typeface="Cambria Math" panose="02040503050406030204" pitchFamily="18" charset="0"/>
+                        </a:rPr>
+                        <m:t>𝐸</m:t>
+                      </m:r>
+                      <m:r>
+                        <a:rPr lang="en-GB" i="1">
+                          <a:latin typeface="Cambria Math" panose="02040503050406030204" pitchFamily="18" charset="0"/>
+                        </a:rPr>
+                        <m:t>[</m:t>
+                      </m:r>
+                      <m:r>
+                        <a:rPr lang="en-GB" i="1">
+                          <a:latin typeface="Cambria Math" panose="02040503050406030204" pitchFamily="18" charset="0"/>
+                        </a:rPr>
+                        <m:t>𝑈</m:t>
+                      </m:r>
+                      <m:r>
+                        <a:rPr lang="en-GB" i="1">
+                          <a:latin typeface="Cambria Math" panose="02040503050406030204" pitchFamily="18" charset="0"/>
+                        </a:rPr>
+                        <m:t> </m:t>
+                      </m:r>
+                      <m:d>
+                        <m:dPr>
+                          <m:ctrlPr>
+                            <a:rPr lang="en-GB" i="1">
+                              <a:latin typeface="Cambria Math" panose="02040503050406030204" pitchFamily="18" charset="0"/>
+                            </a:rPr>
+                          </m:ctrlPr>
+                        </m:dPr>
+                        <m:e>
+                          <m:r>
+                            <a:rPr lang="en-GB" b="0" i="1" smtClean="0">
+                              <a:latin typeface="Cambria Math" panose="02040503050406030204" pitchFamily="18" charset="0"/>
+                            </a:rPr>
+                            <m:t>𝑒𝑢</m:t>
+                          </m:r>
+                          <m:r>
+                            <a:rPr lang="en-GB" i="1">
+                              <a:latin typeface="Cambria Math" panose="02040503050406030204" pitchFamily="18" charset="0"/>
+                            </a:rPr>
+                            <m:t>;</m:t>
+                          </m:r>
+                          <m:r>
+                            <a:rPr lang="en-GB" i="1">
+                              <a:latin typeface="Cambria Math" panose="02040503050406030204" pitchFamily="18" charset="0"/>
+                            </a:rPr>
+                            <m:t>𝑒𝑠𝑐𝑎𝑙𝑎𝑡𝑒</m:t>
+                          </m:r>
+                        </m:e>
+                      </m:d>
+                      <m:r>
+                        <a:rPr lang="en-GB" i="1">
+                          <a:latin typeface="Cambria Math" panose="02040503050406030204" pitchFamily="18" charset="0"/>
+                        </a:rPr>
+                        <m:t>]</m:t>
+                      </m:r>
+                      <m:r>
+                        <a:rPr lang="en-GB" i="1">
+                          <a:latin typeface="Cambria Math" panose="02040503050406030204" pitchFamily="18" charset="0"/>
+                        </a:rPr>
+                        <m:t>=</m:t>
+                      </m:r>
+                      <m:r>
+                        <a:rPr lang="en-GB" i="1">
+                          <a:latin typeface="Cambria Math" panose="02040503050406030204" pitchFamily="18" charset="0"/>
+                        </a:rPr>
+                        <m:t>𝐸</m:t>
+                      </m:r>
+                      <m:r>
+                        <a:rPr lang="en-GB" i="1">
+                          <a:latin typeface="Cambria Math" panose="02040503050406030204" pitchFamily="18" charset="0"/>
+                        </a:rPr>
+                        <m:t>[</m:t>
+                      </m:r>
+                      <m:r>
+                        <a:rPr lang="en-GB" i="1">
+                          <a:latin typeface="Cambria Math" panose="02040503050406030204" pitchFamily="18" charset="0"/>
+                        </a:rPr>
+                        <m:t>𝑈</m:t>
+                      </m:r>
+                      <m:r>
+                        <a:rPr lang="en-GB" i="1">
+                          <a:latin typeface="Cambria Math" panose="02040503050406030204" pitchFamily="18" charset="0"/>
+                        </a:rPr>
+                        <m:t> </m:t>
+                      </m:r>
+                      <m:d>
+                        <m:dPr>
+                          <m:ctrlPr>
+                            <a:rPr lang="en-GB" i="1">
+                              <a:latin typeface="Cambria Math" panose="02040503050406030204" pitchFamily="18" charset="0"/>
+                            </a:rPr>
+                          </m:ctrlPr>
+                        </m:dPr>
+                        <m:e>
+                          <m:r>
+                            <a:rPr lang="en-GB" b="0" i="1" smtClean="0">
+                              <a:latin typeface="Cambria Math" panose="02040503050406030204" pitchFamily="18" charset="0"/>
+                            </a:rPr>
+                            <m:t>𝑒𝑢</m:t>
+                          </m:r>
+                          <m:r>
+                            <a:rPr lang="en-GB" i="1">
+                              <a:latin typeface="Cambria Math" panose="02040503050406030204" pitchFamily="18" charset="0"/>
+                            </a:rPr>
+                            <m:t>;</m:t>
+                          </m:r>
+                          <m:r>
+                            <a:rPr lang="en-GB" i="1">
+                              <a:latin typeface="Cambria Math" panose="02040503050406030204" pitchFamily="18" charset="0"/>
+                            </a:rPr>
+                            <m:t>𝑠𝑤𝑒𝑟𝑣𝑒</m:t>
+                          </m:r>
+                        </m:e>
+                      </m:d>
+                      <m:r>
+                        <a:rPr lang="en-GB">
+                          <a:latin typeface="Cambria Math" panose="02040503050406030204" pitchFamily="18" charset="0"/>
+                        </a:rPr>
+                        <m:t>]</m:t>
+                      </m:r>
+                    </m:oMath>
+                  </m:oMathPara>
+                </a14:m>
+                <a:endParaRPr lang="en-GB" dirty="0"/>
+              </a:p>
+              <a:p>
+                <a:endParaRPr lang="en-GB" dirty="0"/>
+              </a:p>
+            </p:txBody>
+          </p:sp>
+        </mc:Choice>
+        <mc:Fallback>
+          <p:sp>
+            <p:nvSpPr>
+              <p:cNvPr id="23" name="TextBox 22">
+                <a:extLst>
+                  <a:ext uri="{FF2B5EF4-FFF2-40B4-BE49-F238E27FC236}">
+                    <a16:creationId xmlns:a16="http://schemas.microsoft.com/office/drawing/2014/main" id="{202D2835-666E-1573-34BC-C044AF68744C}"/>
+                  </a:ext>
+                </a:extLst>
+              </p:cNvPr>
+              <p:cNvSpPr txBox="1">
+                <a:spLocks noRot="1" noChangeAspect="1" noMove="1" noResize="1" noEditPoints="1" noAdjustHandles="1" noChangeArrowheads="1" noChangeShapeType="1" noTextEdit="1"/>
+              </p:cNvSpPr>
+              <p:nvPr/>
+            </p:nvSpPr>
+            <p:spPr>
+              <a:xfrm>
+                <a:off x="1231641" y="1772816"/>
+                <a:ext cx="4349396" cy="923330"/>
+              </a:xfrm>
+              <a:prstGeom prst="rect">
+                <a:avLst/>
+              </a:prstGeom>
+              <a:blipFill>
+                <a:blip r:embed="rId5"/>
+                <a:stretch>
+                  <a:fillRect/>
+                </a:stretch>
+              </a:blipFill>
+            </p:spPr>
+            <p:txBody>
+              <a:bodyPr/>
+              <a:lstStyle/>
+              <a:p>
+                <a:r>
+                  <a:rPr lang="en-GB">
+                    <a:noFill/>
+                  </a:rPr>
+                  <a:t> </a:t>
+                </a:r>
+              </a:p>
+            </p:txBody>
+          </p:sp>
+        </mc:Fallback>
+      </mc:AlternateContent>
     </p:spTree>
     <p:extLst>
       <p:ext uri="{BB962C8B-B14F-4D97-AF65-F5344CB8AC3E}">
@@ -3226,31 +4111,594 @@
           </a:p>
         </p:txBody>
       </p:sp>
-      <p:sp>
-        <p:nvSpPr>
-          <p:cNvPr id="3" name="Content Placeholder 2">
-            <a:extLst>
-              <a:ext uri="{FF2B5EF4-FFF2-40B4-BE49-F238E27FC236}">
-                <a16:creationId xmlns:a16="http://schemas.microsoft.com/office/drawing/2014/main" id="{E7EECFAA-BCF9-D71B-C646-0C0C56A67A99}"/>
-              </a:ext>
-            </a:extLst>
-          </p:cNvPr>
-          <p:cNvSpPr>
-            <a:spLocks noGrp="1"/>
-          </p:cNvSpPr>
-          <p:nvPr>
-            <p:ph idx="1"/>
-          </p:nvPr>
-        </p:nvSpPr>
-        <p:spPr/>
-        <p:txBody>
-          <a:bodyPr/>
-          <a:lstStyle/>
-          <a:p>
-            <a:endParaRPr lang="en-GB" dirty="0"/>
-          </a:p>
-        </p:txBody>
-      </p:sp>
+      <mc:AlternateContent xmlns:mc="http://schemas.openxmlformats.org/markup-compatibility/2006">
+        <mc:Choice xmlns:a14="http://schemas.microsoft.com/office/drawing/2010/main" Requires="a14">
+          <p:sp>
+            <p:nvSpPr>
+              <p:cNvPr id="11" name="Content Placeholder 10">
+                <a:extLst>
+                  <a:ext uri="{FF2B5EF4-FFF2-40B4-BE49-F238E27FC236}">
+                    <a16:creationId xmlns:a16="http://schemas.microsoft.com/office/drawing/2014/main" id="{030A2210-6E3C-7373-596C-22834B2FB128}"/>
+                  </a:ext>
+                </a:extLst>
+              </p:cNvPr>
+              <p:cNvSpPr>
+                <a:spLocks noGrp="1"/>
+              </p:cNvSpPr>
+              <p:nvPr>
+                <p:ph idx="1"/>
+              </p:nvPr>
+            </p:nvSpPr>
+            <p:spPr/>
+            <p:txBody>
+              <a:bodyPr/>
+              <a:lstStyle/>
+              <a:p>
+                <a14:m>
+                  <m:oMath xmlns:m="http://schemas.openxmlformats.org/officeDocument/2006/math">
+                    <m:r>
+                      <a:rPr lang="en-GB" i="1" smtClean="0"/>
+                      <m:t>𝑉</m:t>
+                    </m:r>
+                    <m:d>
+                      <m:dPr>
+                        <m:ctrlPr>
+                          <a:rPr lang="en-GB" i="1"/>
+                        </m:ctrlPr>
+                      </m:dPr>
+                      <m:e>
+                        <m:r>
+                          <a:rPr lang="en-GB" i="1"/>
+                          <m:t>𝑥</m:t>
+                        </m:r>
+                      </m:e>
+                    </m:d>
+                    <m:r>
+                      <a:rPr lang="en-GB" i="1"/>
+                      <m:t>=</m:t>
+                    </m:r>
+                    <m:nary>
+                      <m:naryPr>
+                        <m:chr m:val="∑"/>
+                        <m:limLoc m:val="undOvr"/>
+                        <m:ctrlPr>
+                          <a:rPr lang="en-GB" i="1"/>
+                        </m:ctrlPr>
+                      </m:naryPr>
+                      <m:sub>
+                        <m:r>
+                          <a:rPr lang="en-GB" i="1"/>
+                          <m:t>𝑖</m:t>
+                        </m:r>
+                        <m:r>
+                          <a:rPr lang="en-GB" i="1"/>
+                          <m:t>=1</m:t>
+                        </m:r>
+                      </m:sub>
+                      <m:sup>
+                        <m:r>
+                          <a:rPr lang="en-GB" i="1"/>
+                          <m:t>𝑜</m:t>
+                        </m:r>
+                      </m:sup>
+                      <m:e>
+                        <m:sSub>
+                          <m:sSubPr>
+                            <m:ctrlPr>
+                              <a:rPr lang="en-GB" i="1"/>
+                            </m:ctrlPr>
+                          </m:sSubPr>
+                          <m:e>
+                            <m:r>
+                              <a:rPr lang="en-GB" i="1"/>
+                              <m:t>𝜋</m:t>
+                            </m:r>
+                            <m:d>
+                              <m:dPr>
+                                <m:ctrlPr>
+                                  <a:rPr lang="en-GB" i="1"/>
+                                </m:ctrlPr>
+                              </m:dPr>
+                              <m:e>
+                                <m:r>
+                                  <a:rPr lang="en-GB" i="1"/>
+                                  <m:t>𝑝</m:t>
+                                </m:r>
+                              </m:e>
+                            </m:d>
+                          </m:e>
+                          <m:sub>
+                            <m:r>
+                              <a:rPr lang="en-GB" i="1"/>
+                              <m:t>𝑜</m:t>
+                            </m:r>
+                          </m:sub>
+                        </m:sSub>
+                        <m:sSub>
+                          <m:sSubPr>
+                            <m:ctrlPr>
+                              <a:rPr lang="en-GB" i="1"/>
+                            </m:ctrlPr>
+                          </m:sSubPr>
+                          <m:e>
+                            <m:r>
+                              <a:rPr lang="en-GB" i="1"/>
+                              <m:t>𝑣</m:t>
+                            </m:r>
+                            <m:r>
+                              <a:rPr lang="en-GB" i="1"/>
+                              <m:t>(</m:t>
+                            </m:r>
+                            <m:r>
+                              <a:rPr lang="en-GB" i="1"/>
+                              <m:t>𝑥</m:t>
+                            </m:r>
+                            <m:r>
+                              <a:rPr lang="en-GB" i="1"/>
+                              <m:t>)</m:t>
+                            </m:r>
+                          </m:e>
+                          <m:sub>
+                            <m:r>
+                              <a:rPr lang="en-GB" i="1"/>
+                              <m:t>𝑜</m:t>
+                            </m:r>
+                          </m:sub>
+                        </m:sSub>
+                      </m:e>
+                    </m:nary>
+                  </m:oMath>
+                </a14:m>
+                <a:r>
+                  <a:rPr lang="en-GB" dirty="0"/>
+                  <a:t> Value function over all outcomes o </a:t>
+                </a:r>
+              </a:p>
+              <a:p>
+                <a14:m>
+                  <m:oMath xmlns:m="http://schemas.openxmlformats.org/officeDocument/2006/math">
+                    <m:r>
+                      <a:rPr lang="en-GB" i="1"/>
+                      <m:t>𝑣</m:t>
+                    </m:r>
+                  </m:oMath>
+                </a14:m>
+                <a:r>
+                  <a:rPr lang="en-GB" dirty="0"/>
+                  <a:t> (x)=</a:t>
+                </a:r>
+                <a14:m>
+                  <m:oMath xmlns:m="http://schemas.openxmlformats.org/officeDocument/2006/math">
+                    <m:m>
+                      <m:mPr>
+                        <m:plcHide m:val="on"/>
+                        <m:mcs>
+                          <m:mc>
+                            <m:mcPr>
+                              <m:count m:val="2"/>
+                              <m:mcJc m:val="center"/>
+                            </m:mcPr>
+                          </m:mc>
+                        </m:mcs>
+                        <m:ctrlPr>
+                          <a:rPr lang="en-GB" i="1"/>
+                        </m:ctrlPr>
+                      </m:mPr>
+                      <m:mr>
+                        <m:e>
+                          <m:d>
+                            <m:dPr>
+                              <m:begChr m:val="{"/>
+                              <m:endChr m:val=""/>
+                              <m:ctrlPr>
+                                <a:rPr lang="en-GB" i="1"/>
+                              </m:ctrlPr>
+                            </m:dPr>
+                            <m:e>
+                              <m:eqArr>
+                                <m:eqArrPr>
+                                  <m:ctrlPr>
+                                    <a:rPr lang="en-GB" i="1"/>
+                                  </m:ctrlPr>
+                                </m:eqArrPr>
+                                <m:e>
+                                  <m:sSup>
+                                    <m:sSupPr>
+                                      <m:ctrlPr>
+                                        <a:rPr lang="en-GB" i="1"/>
+                                      </m:ctrlPr>
+                                    </m:sSupPr>
+                                    <m:e>
+                                      <m:r>
+                                        <a:rPr lang="en-GB" i="1"/>
+                                        <m:t>𝑥</m:t>
+                                      </m:r>
+                                    </m:e>
+                                    <m:sup>
+                                      <m:r>
+                                        <a:rPr lang="en-GB" i="1"/>
+                                        <m:t>0.5</m:t>
+                                      </m:r>
+                                    </m:sup>
+                                  </m:sSup>
+                                  <m:r>
+                                    <a:rPr lang="en-GB" i="1"/>
+                                    <m:t>,</m:t>
+                                  </m:r>
+                                  <m:r>
+                                    <a:rPr lang="en-GB" i="1"/>
+                                    <m:t>𝑥</m:t>
+                                  </m:r>
+                                  <m:r>
+                                    <a:rPr lang="en-GB" i="1"/>
+                                    <m:t>≥0</m:t>
+                                  </m:r>
+                                </m:e>
+                                <m:e>
+                                  <m:r>
+                                    <a:rPr lang="en-GB" i="1"/>
+                                    <m:t>−2</m:t>
+                                  </m:r>
+                                  <m:sSup>
+                                    <m:sSupPr>
+                                      <m:ctrlPr>
+                                        <a:rPr lang="en-GB" i="1"/>
+                                      </m:ctrlPr>
+                                    </m:sSupPr>
+                                    <m:e>
+                                      <m:d>
+                                        <m:dPr>
+                                          <m:ctrlPr>
+                                            <a:rPr lang="en-GB" i="1"/>
+                                          </m:ctrlPr>
+                                        </m:dPr>
+                                        <m:e>
+                                          <m:r>
+                                            <a:rPr lang="en-GB" i="1"/>
+                                            <m:t>−</m:t>
+                                          </m:r>
+                                          <m:r>
+                                            <a:rPr lang="en-GB" i="1"/>
+                                            <m:t>𝑥</m:t>
+                                          </m:r>
+                                        </m:e>
+                                      </m:d>
+                                    </m:e>
+                                    <m:sup>
+                                      <m:r>
+                                        <a:rPr lang="en-GB" i="1"/>
+                                        <m:t>0.5</m:t>
+                                      </m:r>
+                                    </m:sup>
+                                  </m:sSup>
+                                  <m:r>
+                                    <a:rPr lang="en-GB" i="1"/>
+                                    <m:t>,</m:t>
+                                  </m:r>
+                                  <m:r>
+                                    <a:rPr lang="en-GB" i="1"/>
+                                    <m:t>𝑥</m:t>
+                                  </m:r>
+                                  <m:r>
+                                    <a:rPr lang="en-GB" i="1"/>
+                                    <m:t>&lt;0</m:t>
+                                  </m:r>
+                                </m:e>
+                              </m:eqArr>
+                            </m:e>
+                          </m:d>
+                        </m:e>
+                        <m:e/>
+                      </m:mr>
+                    </m:m>
+                  </m:oMath>
+                </a14:m>
+                <a:r>
+                  <a:rPr lang="en-GB" dirty="0"/>
+                  <a:t>utility function with respect to status quo with the reflection effect</a:t>
+                </a:r>
+              </a:p>
+              <a:p>
+                <a14:m>
+                  <m:oMath xmlns:m="http://schemas.openxmlformats.org/officeDocument/2006/math">
+                    <m:r>
+                      <a:rPr lang="en-GB" i="1"/>
+                      <m:t>𝜋</m:t>
+                    </m:r>
+                    <m:r>
+                      <a:rPr lang="en-GB" i="1"/>
+                      <m:t>(</m:t>
+                    </m:r>
+                    <m:r>
+                      <a:rPr lang="en-GB" i="1"/>
+                      <m:t>𝑝</m:t>
+                    </m:r>
+                    <m:r>
+                      <a:rPr lang="en-GB" i="1"/>
+                      <m:t>)=</m:t>
+                    </m:r>
+                    <m:sSup>
+                      <m:sSupPr>
+                        <m:ctrlPr>
+                          <a:rPr lang="en-GB" i="1"/>
+                        </m:ctrlPr>
+                      </m:sSupPr>
+                      <m:e>
+                        <m:r>
+                          <a:rPr lang="en-GB" i="1"/>
+                          <m:t>𝑒</m:t>
+                        </m:r>
+                      </m:e>
+                      <m:sup>
+                        <m:sSup>
+                          <m:sSupPr>
+                            <m:ctrlPr>
+                              <a:rPr lang="en-GB" i="1"/>
+                            </m:ctrlPr>
+                          </m:sSupPr>
+                          <m:e>
+                            <m:r>
+                              <a:rPr lang="en-GB" i="1"/>
+                              <m:t>−(−</m:t>
+                            </m:r>
+                            <m:r>
+                              <a:rPr lang="en-GB" i="1"/>
+                              <m:t>𝑙𝑛</m:t>
+                            </m:r>
+                            <m:r>
+                              <a:rPr lang="en-GB" i="1"/>
+                              <m:t>(</m:t>
+                            </m:r>
+                            <m:r>
+                              <a:rPr lang="en-GB" i="1"/>
+                              <m:t>𝐹</m:t>
+                            </m:r>
+                            <m:r>
+                              <a:rPr lang="en-GB" i="1"/>
+                              <m:t>(</m:t>
+                            </m:r>
+                            <m:r>
+                              <a:rPr lang="en-GB" i="1"/>
+                              <m:t>𝑥</m:t>
+                            </m:r>
+                            <m:r>
+                              <a:rPr lang="en-GB" i="1"/>
+                              <m:t>)))</m:t>
+                            </m:r>
+                          </m:e>
+                          <m:sup>
+                            <m:r>
+                              <a:rPr lang="en-GB" i="1"/>
+                              <m:t>𝑎</m:t>
+                            </m:r>
+                          </m:sup>
+                        </m:sSup>
+                      </m:sup>
+                    </m:sSup>
+                  </m:oMath>
+                </a14:m>
+                <a:r>
+                  <a:rPr lang="en-GB" dirty="0"/>
+                  <a:t>,</a:t>
+                </a:r>
+                <a:r>
+                  <a:rPr lang="en-GB" dirty="0" err="1"/>
+                  <a:t>Prelec</a:t>
+                </a:r>
+                <a:r>
+                  <a:rPr lang="en-GB" dirty="0"/>
+                  <a:t>(1998) weighting function  a=0.5 for plotting purposes.</a:t>
+                </a:r>
+              </a:p>
+              <a:p>
+                <a14:m>
+                  <m:oMath xmlns:m="http://schemas.openxmlformats.org/officeDocument/2006/math">
+                    <m:r>
+                      <a:rPr lang="en-GB" i="1"/>
+                      <m:t>𝐹</m:t>
+                    </m:r>
+                    <m:d>
+                      <m:dPr>
+                        <m:ctrlPr>
+                          <a:rPr lang="en-GB" i="1"/>
+                        </m:ctrlPr>
+                      </m:dPr>
+                      <m:e>
+                        <m:r>
+                          <a:rPr lang="en-GB" i="1"/>
+                          <m:t>𝑥</m:t>
+                        </m:r>
+                      </m:e>
+                    </m:d>
+                    <m:r>
+                      <a:rPr lang="en-GB" i="1"/>
+                      <m:t>=1−</m:t>
+                    </m:r>
+                    <m:r>
+                      <a:rPr lang="en-GB" i="1"/>
+                      <m:t>𝐶</m:t>
+                    </m:r>
+                    <m:sSup>
+                      <m:sSupPr>
+                        <m:ctrlPr>
+                          <a:rPr lang="en-GB" i="1"/>
+                        </m:ctrlPr>
+                      </m:sSupPr>
+                      <m:e>
+                        <m:r>
+                          <a:rPr lang="en-GB" i="1"/>
+                          <m:t>𝑥</m:t>
+                        </m:r>
+                      </m:e>
+                      <m:sup>
+                        <m:r>
+                          <a:rPr lang="en-GB" i="1"/>
+                          <m:t>−</m:t>
+                        </m:r>
+                        <m:r>
+                          <a:rPr lang="en-GB" i="1"/>
+                          <m:t>𝑘</m:t>
+                        </m:r>
+                      </m:sup>
+                    </m:sSup>
+                    <m:r>
+                      <a:rPr lang="en-GB" i="1"/>
+                      <m:t>, </m:t>
+                    </m:r>
+                  </m:oMath>
+                </a14:m>
+                <a:endParaRPr lang="en-GB" i="1" dirty="0"/>
+              </a:p>
+              <a:p>
+                <a14:m>
+                  <m:oMath xmlns:m="http://schemas.openxmlformats.org/officeDocument/2006/math">
+                    <m:r>
+                      <a:rPr lang="en-GB" i="1"/>
+                      <m:t>𝜋</m:t>
+                    </m:r>
+                    <m:d>
+                      <m:dPr>
+                        <m:ctrlPr>
+                          <a:rPr lang="en-GB" i="1"/>
+                        </m:ctrlPr>
+                      </m:dPr>
+                      <m:e>
+                        <m:r>
+                          <a:rPr lang="en-GB" i="1"/>
+                          <m:t>𝑝</m:t>
+                        </m:r>
+                      </m:e>
+                    </m:d>
+                    <m:r>
+                      <a:rPr lang="en-GB" i="1"/>
+                      <m:t>=</m:t>
+                    </m:r>
+                    <m:r>
+                      <m:rPr>
+                        <m:sty m:val="p"/>
+                      </m:rPr>
+                      <a:rPr lang="en-GB"/>
+                      <m:t>exp</m:t>
+                    </m:r>
+                    <m:r>
+                      <a:rPr lang="en-GB" i="1"/>
+                      <m:t>(−</m:t>
+                    </m:r>
+                  </m:oMath>
+                </a14:m>
+                <a:r>
+                  <a:rPr lang="en-GB" dirty="0"/>
+                  <a:t>[</a:t>
+                </a:r>
+                <a14:m>
+                  <m:oMath xmlns:m="http://schemas.openxmlformats.org/officeDocument/2006/math">
+                    <m:r>
+                      <a:rPr lang="en-GB" i="1"/>
+                      <m:t>1−</m:t>
+                    </m:r>
+                    <m:r>
+                      <a:rPr lang="en-GB" i="1"/>
+                      <m:t>𝐶</m:t>
+                    </m:r>
+                    <m:sSup>
+                      <m:sSupPr>
+                        <m:ctrlPr>
+                          <a:rPr lang="en-GB" i="1"/>
+                        </m:ctrlPr>
+                      </m:sSupPr>
+                      <m:e>
+                        <m:r>
+                          <a:rPr lang="en-GB" i="1"/>
+                          <m:t>𝑥</m:t>
+                        </m:r>
+                      </m:e>
+                      <m:sup>
+                        <m:r>
+                          <a:rPr lang="en-GB" i="1"/>
+                          <m:t>−</m:t>
+                        </m:r>
+                        <m:r>
+                          <a:rPr lang="en-GB" i="1"/>
+                          <m:t>𝑘</m:t>
+                        </m:r>
+                      </m:sup>
+                    </m:sSup>
+                    <m:sSup>
+                      <m:sSupPr>
+                        <m:ctrlPr>
+                          <a:rPr lang="en-GB" i="1"/>
+                        </m:ctrlPr>
+                      </m:sSupPr>
+                      <m:e>
+                        <m:r>
+                          <a:rPr lang="en-GB" i="1"/>
+                          <m:t>]</m:t>
+                        </m:r>
+                      </m:e>
+                      <m:sup>
+                        <m:r>
+                          <a:rPr lang="en-GB" i="1"/>
+                          <m:t>𝑎</m:t>
+                        </m:r>
+                      </m:sup>
+                    </m:sSup>
+                    <m:r>
+                      <a:rPr lang="en-GB" i="1"/>
+                      <m:t>)</m:t>
+                    </m:r>
+                  </m:oMath>
+                </a14:m>
+                <a:r>
+                  <a:rPr lang="en-GB" dirty="0"/>
+                  <a:t> Weighting function under the power law</a:t>
+                </a:r>
+              </a:p>
+              <a:p>
+                <a:endParaRPr lang="en-GB" dirty="0"/>
+              </a:p>
+            </p:txBody>
+          </p:sp>
+        </mc:Choice>
+        <mc:Fallback>
+          <p:sp>
+            <p:nvSpPr>
+              <p:cNvPr id="11" name="Content Placeholder 10">
+                <a:extLst>
+                  <a:ext uri="{FF2B5EF4-FFF2-40B4-BE49-F238E27FC236}">
+                    <a16:creationId xmlns:a16="http://schemas.microsoft.com/office/drawing/2014/main" id="{030A2210-6E3C-7373-596C-22834B2FB128}"/>
+                  </a:ext>
+                </a:extLst>
+              </p:cNvPr>
+              <p:cNvSpPr>
+                <a:spLocks noGrp="1" noRot="1" noChangeAspect="1" noMove="1" noResize="1" noEditPoints="1" noAdjustHandles="1" noChangeArrowheads="1" noChangeShapeType="1" noTextEdit="1"/>
+              </p:cNvSpPr>
+              <p:nvPr>
+                <p:ph idx="1"/>
+              </p:nvPr>
+            </p:nvSpPr>
+            <p:spPr>
+              <a:blipFill>
+                <a:blip r:embed="rId2"/>
+                <a:stretch>
+                  <a:fillRect t="-2241" r="-406"/>
+                </a:stretch>
+              </a:blipFill>
+            </p:spPr>
+            <p:txBody>
+              <a:bodyPr/>
+              <a:lstStyle/>
+              <a:p>
+                <a:r>
+                  <a:rPr lang="en-GB">
+                    <a:noFill/>
+                  </a:rPr>
+                  <a:t> </a:t>
+                </a:r>
+              </a:p>
+            </p:txBody>
+          </p:sp>
+        </mc:Fallback>
+      </mc:AlternateContent>
     </p:spTree>
     <p:extLst>
       <p:ext uri="{BB962C8B-B14F-4D97-AF65-F5344CB8AC3E}">
@@ -3267,6 +4715,14 @@
 <file path=ppt/slides/slide4.xml><?xml version="1.0" encoding="utf-8"?>
 <p:sld xmlns:a="http://schemas.openxmlformats.org/drawingml/2006/main" xmlns:r="http://schemas.openxmlformats.org/officeDocument/2006/relationships" xmlns:p="http://schemas.openxmlformats.org/presentationml/2006/main">
   <p:cSld>
+    <p:bg>
+      <p:bgPr>
+        <a:solidFill>
+          <a:schemeClr val="bg1"/>
+        </a:solidFill>
+        <a:effectLst/>
+      </p:bgPr>
+    </p:bg>
     <p:spTree>
       <p:nvGrpSpPr>
         <p:cNvPr id="1" name=""/>
@@ -3283,10 +4739,76 @@
       </p:grpSpPr>
       <p:sp>
         <p:nvSpPr>
+          <p:cNvPr id="18" name="Down Arrow 7">
+            <a:extLst>
+              <a:ext uri="{FF2B5EF4-FFF2-40B4-BE49-F238E27FC236}">
+                <a16:creationId xmlns:a16="http://schemas.microsoft.com/office/drawing/2014/main" id="{D4771268-CB57-404A-9271-370EB28F6090}"/>
+              </a:ext>
+              <a:ext uri="{C183D7F6-B498-43B3-948B-1728B52AA6E4}">
+                <adec:decorative xmlns:adec="http://schemas.microsoft.com/office/drawing/2017/decorative" val="1"/>
+              </a:ext>
+            </a:extLst>
+          </p:cNvPr>
+          <p:cNvSpPr>
+            <a:spLocks noGrp="1" noRot="1" noChangeAspect="1" noMove="1" noResize="1" noEditPoints="1" noAdjustHandles="1" noChangeArrowheads="1" noChangeShapeType="1" noTextEdit="1"/>
+          </p:cNvSpPr>
+          <p:nvPr>
+            <p:extLst>
+              <p:ext uri="{386F3935-93C4-4BCD-93E2-E3B085C9AB24}">
+                <p16:designElem xmlns:p16="http://schemas.microsoft.com/office/powerpoint/2015/main" val="1"/>
+              </p:ext>
+            </p:extLst>
+          </p:nvPr>
+        </p:nvSpPr>
+        <p:spPr>
+          <a:xfrm rot="16200000">
+            <a:off x="800100" y="1491343"/>
+            <a:ext cx="3333749" cy="3499103"/>
+          </a:xfrm>
+          <a:prstGeom prst="downArrow">
+            <a:avLst>
+              <a:gd name="adj1" fmla="val 100000"/>
+              <a:gd name="adj2" fmla="val 15788"/>
+            </a:avLst>
+          </a:prstGeom>
+          <a:solidFill>
+            <a:srgbClr val="404040"/>
+          </a:solidFill>
+          <a:ln w="53975">
+            <a:noFill/>
+          </a:ln>
+        </p:spPr>
+        <p:style>
+          <a:lnRef idx="2">
+            <a:schemeClr val="accent1">
+              <a:shade val="50000"/>
+            </a:schemeClr>
+          </a:lnRef>
+          <a:fillRef idx="1">
+            <a:schemeClr val="accent1"/>
+          </a:fillRef>
+          <a:effectRef idx="0">
+            <a:schemeClr val="accent1"/>
+          </a:effectRef>
+          <a:fontRef idx="minor">
+            <a:schemeClr val="lt1"/>
+          </a:fontRef>
+        </p:style>
+        <p:txBody>
+          <a:bodyPr rtlCol="0" anchor="ctr"/>
+          <a:lstStyle/>
+          <a:p>
+            <a:pPr algn="ctr"/>
+            <a:endParaRPr lang="en-US"/>
+          </a:p>
+        </p:txBody>
+      </p:sp>
+      <p:sp>
+        <p:nvSpPr>
           <p:cNvPr id="2" name="Title 1">
             <a:extLst>
               <a:ext uri="{FF2B5EF4-FFF2-40B4-BE49-F238E27FC236}">
-                <a16:creationId xmlns:a16="http://schemas.microsoft.com/office/drawing/2014/main" id="{B6B3775E-22FE-4034-1E24-8E0EBDC17E3B}"/>
+                <a16:creationId xmlns:a16="http://schemas.microsoft.com/office/drawing/2014/main" id="{14FDD7D8-CF90-939A-82A8-FDADB2F50FA8}"/>
               </a:ext>
             </a:extLst>
           </p:cNvPr>
@@ -3297,49 +4819,76 @@
             <p:ph type="title"/>
           </p:nvPr>
         </p:nvSpPr>
-        <p:spPr/>
-        <p:txBody>
-          <a:bodyPr>
+        <p:spPr>
+          <a:xfrm>
+            <a:off x="1028700" y="1967266"/>
+            <a:ext cx="2628900" cy="2547257"/>
+          </a:xfrm>
+          <a:noFill/>
+        </p:spPr>
+        <p:txBody>
+          <a:bodyPr vert="horz" lIns="91440" tIns="45720" rIns="91440" bIns="45720" rtlCol="0" anchor="ctr">
             <a:normAutofit fontScale="90000"/>
           </a:bodyPr>
           <a:lstStyle/>
           <a:p>
-            <a:r>
-              <a:rPr lang="en-GB" dirty="0"/>
-              <a:t>Framing and risk aversion. Choosing rational outcomes for irrational reasons. The Davos “Swerve”</a:t>
-            </a:r>
-          </a:p>
-        </p:txBody>
-      </p:sp>
-      <p:sp>
-        <p:nvSpPr>
-          <p:cNvPr id="3" name="Content Placeholder 2">
+            <a:pPr algn="ctr"/>
+            <a:r>
+              <a:rPr lang="en-US" sz="3300" kern="1200" dirty="0">
+                <a:solidFill>
+                  <a:srgbClr val="FFFFFF"/>
+                </a:solidFill>
+                <a:latin typeface="+mj-lt"/>
+                <a:ea typeface="+mj-ea"/>
+                <a:cs typeface="+mj-cs"/>
+              </a:rPr>
+              <a:t>Probability Weighting effects under Richardson Law. Irrationality and game dynamics </a:t>
+            </a:r>
+          </a:p>
+        </p:txBody>
+      </p:sp>
+      <p:pic>
+        <p:nvPicPr>
+          <p:cNvPr id="5" name="Content Placeholder 4">
             <a:extLst>
               <a:ext uri="{FF2B5EF4-FFF2-40B4-BE49-F238E27FC236}">
-                <a16:creationId xmlns:a16="http://schemas.microsoft.com/office/drawing/2014/main" id="{CF6F16F0-DECD-DB63-43EB-5EF8CC35E6D2}"/>
+                <a16:creationId xmlns:a16="http://schemas.microsoft.com/office/drawing/2014/main" id="{6270C0BD-6819-5ED1-30E7-C1E0AA3F3718}"/>
               </a:ext>
             </a:extLst>
           </p:cNvPr>
-          <p:cNvSpPr>
-            <a:spLocks noGrp="1"/>
-          </p:cNvSpPr>
+          <p:cNvPicPr>
+            <a:picLocks noGrp="1" noChangeAspect="1"/>
+          </p:cNvPicPr>
           <p:nvPr>
             <p:ph idx="1"/>
           </p:nvPr>
-        </p:nvSpPr>
-        <p:spPr/>
-        <p:txBody>
-          <a:bodyPr/>
-          <a:lstStyle/>
-          <a:p>
-            <a:endParaRPr lang="en-GB" dirty="0"/>
-          </a:p>
-        </p:txBody>
-      </p:sp>
+        </p:nvPicPr>
+        <p:blipFill>
+          <a:blip r:embed="rId2">
+            <a:extLst>
+              <a:ext uri="{28A0092B-C50C-407E-A947-70E740481C1C}">
+                <a14:useLocalDpi xmlns:a14="http://schemas.microsoft.com/office/drawing/2010/main" val="0"/>
+              </a:ext>
+            </a:extLst>
+          </a:blip>
+          <a:stretch>
+            <a:fillRect/>
+          </a:stretch>
+        </p:blipFill>
+        <p:spPr>
+          <a:xfrm>
+            <a:off x="4777316" y="1113922"/>
+            <a:ext cx="6780700" cy="4627827"/>
+          </a:xfrm>
+          <a:prstGeom prst="rect">
+            <a:avLst/>
+          </a:prstGeom>
+        </p:spPr>
+      </p:pic>
     </p:spTree>
     <p:extLst>
       <p:ext uri="{BB962C8B-B14F-4D97-AF65-F5344CB8AC3E}">
-        <p14:creationId xmlns:p14="http://schemas.microsoft.com/office/powerpoint/2010/main" val="2186260024"/>
+        <p14:creationId xmlns:p14="http://schemas.microsoft.com/office/powerpoint/2010/main" val="629165924"/>
       </p:ext>
     </p:extLst>
   </p:cSld>
@@ -3352,6 +4901,14 @@
 <file path=ppt/slides/slide5.xml><?xml version="1.0" encoding="utf-8"?>
 <p:sld xmlns:a="http://schemas.openxmlformats.org/drawingml/2006/main" xmlns:r="http://schemas.openxmlformats.org/officeDocument/2006/relationships" xmlns:p="http://schemas.openxmlformats.org/presentationml/2006/main">
   <p:cSld>
+    <p:bg>
+      <p:bgPr>
+        <a:solidFill>
+          <a:schemeClr val="bg1"/>
+        </a:solidFill>
+        <a:effectLst/>
+      </p:bgPr>
+    </p:bg>
     <p:spTree>
       <p:nvGrpSpPr>
         <p:cNvPr id="1" name=""/>
@@ -3366,12 +4923,72 @@
           <a:chExt cx="0" cy="0"/>
         </a:xfrm>
       </p:grpSpPr>
+      <p:sp useBgFill="1">
+        <p:nvSpPr>
+          <p:cNvPr id="12" name="Rectangle 11">
+            <a:extLst>
+              <a:ext uri="{FF2B5EF4-FFF2-40B4-BE49-F238E27FC236}">
+                <a16:creationId xmlns:a16="http://schemas.microsoft.com/office/drawing/2014/main" id="{022BDE4A-8A20-4A69-9C5A-581C82036A4D}"/>
+              </a:ext>
+              <a:ext uri="{C183D7F6-B498-43B3-948B-1728B52AA6E4}">
+                <adec:decorative xmlns:adec="http://schemas.microsoft.com/office/drawing/2017/decorative" val="1"/>
+              </a:ext>
+            </a:extLst>
+          </p:cNvPr>
+          <p:cNvSpPr>
+            <a:spLocks noGrp="1" noRot="1" noChangeAspect="1" noMove="1" noResize="1" noEditPoints="1" noAdjustHandles="1" noChangeArrowheads="1" noChangeShapeType="1" noTextEdit="1"/>
+          </p:cNvSpPr>
+          <p:nvPr>
+            <p:extLst>
+              <p:ext uri="{386F3935-93C4-4BCD-93E2-E3B085C9AB24}">
+                <p16:designElem xmlns:p16="http://schemas.microsoft.com/office/powerpoint/2015/main" val="1"/>
+              </p:ext>
+            </p:extLst>
+          </p:nvPr>
+        </p:nvSpPr>
+        <p:spPr>
+          <a:xfrm>
+            <a:off x="-1" y="0"/>
+            <a:ext cx="12188952" cy="6858000"/>
+          </a:xfrm>
+          <a:prstGeom prst="rect">
+            <a:avLst/>
+          </a:prstGeom>
+          <a:ln>
+            <a:noFill/>
+          </a:ln>
+        </p:spPr>
+        <p:style>
+          <a:lnRef idx="2">
+            <a:schemeClr val="accent1">
+              <a:shade val="50000"/>
+            </a:schemeClr>
+          </a:lnRef>
+          <a:fillRef idx="1">
+            <a:schemeClr val="accent1"/>
+          </a:fillRef>
+          <a:effectRef idx="0">
+            <a:schemeClr val="accent1"/>
+          </a:effectRef>
+          <a:fontRef idx="minor">
+            <a:schemeClr val="lt1"/>
+          </a:fontRef>
+        </p:style>
+        <p:txBody>
+          <a:bodyPr rtlCol="0" anchor="ctr"/>
+          <a:lstStyle/>
+          <a:p>
+            <a:pPr algn="ctr"/>
+            <a:endParaRPr lang="en-US"/>
+          </a:p>
+        </p:txBody>
+      </p:sp>
       <p:sp>
         <p:nvSpPr>
           <p:cNvPr id="2" name="Title 1">
             <a:extLst>
               <a:ext uri="{FF2B5EF4-FFF2-40B4-BE49-F238E27FC236}">
-                <a16:creationId xmlns:a16="http://schemas.microsoft.com/office/drawing/2014/main" id="{0C9ACCB9-9EAE-EE93-7A51-70A7BD728D35}"/>
+                <a16:creationId xmlns:a16="http://schemas.microsoft.com/office/drawing/2014/main" id="{B6B3775E-22FE-4034-1E24-8E0EBDC17E3B}"/>
               </a:ext>
             </a:extLst>
           </p:cNvPr>
@@ -3382,53 +4999,113 @@
             <p:ph type="title"/>
           </p:nvPr>
         </p:nvSpPr>
-        <p:spPr/>
-        <p:txBody>
-          <a:bodyPr>
-            <a:normAutofit fontScale="90000"/>
+        <p:spPr>
+          <a:xfrm>
+            <a:off x="1001684" y="170412"/>
+            <a:ext cx="10178934" cy="1328730"/>
+          </a:xfrm>
+        </p:spPr>
+        <p:txBody>
+          <a:bodyPr vert="horz" lIns="91440" tIns="45720" rIns="91440" bIns="45720" rtlCol="0" anchor="b">
+            <a:normAutofit/>
           </a:bodyPr>
           <a:lstStyle/>
           <a:p>
-            <a:r>
-              <a:rPr lang="en-GB" dirty="0" err="1"/>
-              <a:t>Extra.Strategic</a:t>
-            </a:r>
-            <a:r>
-              <a:rPr lang="en-GB" dirty="0"/>
-              <a:t> hysteresis? The Poisoned Chalice of the Iran Iraq war after Second Khorramshahr(1982). </a:t>
-            </a:r>
-          </a:p>
-        </p:txBody>
-      </p:sp>
-      <p:sp>
-        <p:nvSpPr>
-          <p:cNvPr id="3" name="Content Placeholder 2">
+            <a:pPr algn="ctr"/>
+            <a:r>
+              <a:rPr lang="en-US" sz="3600" kern="1200">
+                <a:solidFill>
+                  <a:schemeClr val="tx1"/>
+                </a:solidFill>
+                <a:latin typeface="+mj-lt"/>
+                <a:ea typeface="+mj-ea"/>
+                <a:cs typeface="+mj-cs"/>
+              </a:rPr>
+              <a:t>Framing and risk aversion. Choosing rational outcomes for irrational reasons. The Davos “Swerve”</a:t>
+            </a:r>
+          </a:p>
+        </p:txBody>
+      </p:sp>
+      <p:pic>
+        <p:nvPicPr>
+          <p:cNvPr id="5" name="Content Placeholder 4">
             <a:extLst>
               <a:ext uri="{FF2B5EF4-FFF2-40B4-BE49-F238E27FC236}">
-                <a16:creationId xmlns:a16="http://schemas.microsoft.com/office/drawing/2014/main" id="{8A1BAA69-6E25-77B0-3F9E-BA957A157EEE}"/>
+                <a16:creationId xmlns:a16="http://schemas.microsoft.com/office/drawing/2014/main" id="{EA774F48-E2F7-FC5C-F2C7-4A00B8944967}"/>
               </a:ext>
             </a:extLst>
           </p:cNvPr>
-          <p:cNvSpPr>
-            <a:spLocks noGrp="1"/>
-          </p:cNvSpPr>
+          <p:cNvPicPr>
+            <a:picLocks noGrp="1" noChangeAspect="1"/>
+          </p:cNvPicPr>
           <p:nvPr>
             <p:ph idx="1"/>
           </p:nvPr>
-        </p:nvSpPr>
-        <p:spPr/>
-        <p:txBody>
-          <a:bodyPr/>
-          <a:lstStyle/>
-          <a:p>
-            <a:endParaRPr lang="en-GB" dirty="0"/>
-          </a:p>
-        </p:txBody>
-      </p:sp>
+        </p:nvPicPr>
+        <p:blipFill>
+          <a:blip r:embed="rId2">
+            <a:extLst>
+              <a:ext uri="{28A0092B-C50C-407E-A947-70E740481C1C}">
+                <a14:useLocalDpi xmlns:a14="http://schemas.microsoft.com/office/drawing/2010/main" val="0"/>
+              </a:ext>
+            </a:extLst>
+          </a:blip>
+          <a:srcRect r="53" b="-2"/>
+          <a:stretch>
+            <a:fillRect/>
+          </a:stretch>
+        </p:blipFill>
+        <p:spPr>
+          <a:xfrm>
+            <a:off x="198741" y="2410448"/>
+            <a:ext cx="5803323" cy="3890357"/>
+          </a:xfrm>
+          <a:prstGeom prst="rect">
+            <a:avLst/>
+          </a:prstGeom>
+        </p:spPr>
+      </p:pic>
+      <p:pic>
+        <p:nvPicPr>
+          <p:cNvPr id="7" name="Picture 6">
+            <a:extLst>
+              <a:ext uri="{FF2B5EF4-FFF2-40B4-BE49-F238E27FC236}">
+                <a16:creationId xmlns:a16="http://schemas.microsoft.com/office/drawing/2014/main" id="{0224B80B-65BC-985B-C677-5369A8BC3D65}"/>
+              </a:ext>
+            </a:extLst>
+          </p:cNvPr>
+          <p:cNvPicPr>
+            <a:picLocks noChangeAspect="1"/>
+          </p:cNvPicPr>
+          <p:nvPr/>
+        </p:nvPicPr>
+        <p:blipFill>
+          <a:blip r:embed="rId3">
+            <a:extLst>
+              <a:ext uri="{28A0092B-C50C-407E-A947-70E740481C1C}">
+                <a14:useLocalDpi xmlns:a14="http://schemas.microsoft.com/office/drawing/2010/main" val="0"/>
+              </a:ext>
+            </a:extLst>
+          </a:blip>
+          <a:srcRect r="-2" b="315"/>
+          <a:stretch>
+            <a:fillRect/>
+          </a:stretch>
+        </p:blipFill>
+        <p:spPr>
+          <a:xfrm>
+            <a:off x="6189934" y="2410448"/>
+            <a:ext cx="5803323" cy="3890357"/>
+          </a:xfrm>
+          <a:prstGeom prst="rect">
+            <a:avLst/>
+          </a:prstGeom>
+        </p:spPr>
+      </p:pic>
     </p:spTree>
     <p:extLst>
       <p:ext uri="{BB962C8B-B14F-4D97-AF65-F5344CB8AC3E}">
-        <p14:creationId xmlns:p14="http://schemas.microsoft.com/office/powerpoint/2010/main" val="1669264391"/>
+        <p14:creationId xmlns:p14="http://schemas.microsoft.com/office/powerpoint/2010/main" val="2186260024"/>
       </p:ext>
     </p:extLst>
   </p:cSld>
@@ -3514,6 +5191,95 @@
     <p:extLst>
       <p:ext uri="{BB962C8B-B14F-4D97-AF65-F5344CB8AC3E}">
         <p14:creationId xmlns:p14="http://schemas.microsoft.com/office/powerpoint/2010/main" val="196967786"/>
+      </p:ext>
+    </p:extLst>
+  </p:cSld>
+  <p:clrMapOvr>
+    <a:masterClrMapping/>
+  </p:clrMapOvr>
+</p:sld>
+</file>
+
+<file path=ppt/slides/slide7.xml><?xml version="1.0" encoding="utf-8"?>
+<p:sld xmlns:a="http://schemas.openxmlformats.org/drawingml/2006/main" xmlns:r="http://schemas.openxmlformats.org/officeDocument/2006/relationships" xmlns:p="http://schemas.openxmlformats.org/presentationml/2006/main">
+  <p:cSld>
+    <p:spTree>
+      <p:nvGrpSpPr>
+        <p:cNvPr id="1" name=""/>
+        <p:cNvGrpSpPr/>
+        <p:nvPr/>
+      </p:nvGrpSpPr>
+      <p:grpSpPr>
+        <a:xfrm>
+          <a:off x="0" y="0"/>
+          <a:ext cx="0" cy="0"/>
+          <a:chOff x="0" y="0"/>
+          <a:chExt cx="0" cy="0"/>
+        </a:xfrm>
+      </p:grpSpPr>
+      <p:sp>
+        <p:nvSpPr>
+          <p:cNvPr id="2" name="Title 1">
+            <a:extLst>
+              <a:ext uri="{FF2B5EF4-FFF2-40B4-BE49-F238E27FC236}">
+                <a16:creationId xmlns:a16="http://schemas.microsoft.com/office/drawing/2014/main" id="{0C9ACCB9-9EAE-EE93-7A51-70A7BD728D35}"/>
+              </a:ext>
+            </a:extLst>
+          </p:cNvPr>
+          <p:cNvSpPr>
+            <a:spLocks noGrp="1"/>
+          </p:cNvSpPr>
+          <p:nvPr>
+            <p:ph type="title"/>
+          </p:nvPr>
+        </p:nvSpPr>
+        <p:spPr/>
+        <p:txBody>
+          <a:bodyPr>
+            <a:normAutofit fontScale="90000"/>
+          </a:bodyPr>
+          <a:lstStyle/>
+          <a:p>
+            <a:r>
+              <a:rPr lang="en-GB" dirty="0" err="1"/>
+              <a:t>Extra.Strategic</a:t>
+            </a:r>
+            <a:r>
+              <a:rPr lang="en-GB" dirty="0"/>
+              <a:t> hysteresis? The Poisoned Chalice of the Iran Iraq war after Second Khorramshahr(1982). </a:t>
+            </a:r>
+          </a:p>
+        </p:txBody>
+      </p:sp>
+      <p:sp>
+        <p:nvSpPr>
+          <p:cNvPr id="3" name="Content Placeholder 2">
+            <a:extLst>
+              <a:ext uri="{FF2B5EF4-FFF2-40B4-BE49-F238E27FC236}">
+                <a16:creationId xmlns:a16="http://schemas.microsoft.com/office/drawing/2014/main" id="{8A1BAA69-6E25-77B0-3F9E-BA957A157EEE}"/>
+              </a:ext>
+            </a:extLst>
+          </p:cNvPr>
+          <p:cNvSpPr>
+            <a:spLocks noGrp="1"/>
+          </p:cNvSpPr>
+          <p:nvPr>
+            <p:ph idx="1"/>
+          </p:nvPr>
+        </p:nvSpPr>
+        <p:spPr/>
+        <p:txBody>
+          <a:bodyPr/>
+          <a:lstStyle/>
+          <a:p>
+            <a:endParaRPr lang="en-GB" dirty="0"/>
+          </a:p>
+        </p:txBody>
+      </p:sp>
+    </p:spTree>
+    <p:extLst>
+      <p:ext uri="{BB962C8B-B14F-4D97-AF65-F5344CB8AC3E}">
+        <p14:creationId xmlns:p14="http://schemas.microsoft.com/office/powerpoint/2010/main" val="1669264391"/>
       </p:ext>
     </p:extLst>
   </p:cSld>
